--- a/UAPs/UAPs_Murders.pptx
+++ b/UAPs/UAPs_Murders.pptx
@@ -54,8 +54,8 @@
     <p:sldId id="322" r:id="rId48"/>
     <p:sldId id="323" r:id="rId49"/>
     <p:sldId id="324" r:id="rId50"/>
-    <p:sldId id="325" r:id="rId51"/>
-    <p:sldId id="326" r:id="rId52"/>
+    <p:sldId id="326" r:id="rId51"/>
+    <p:sldId id="339" r:id="rId52"/>
     <p:sldId id="327" r:id="rId53"/>
     <p:sldId id="328" r:id="rId54"/>
     <p:sldId id="329" r:id="rId55"/>
@@ -26134,7 +26134,7 @@
                   <a:schemeClr val="accent5"/>
                 </a:solidFill>
               </a:rPr>
-              <a:t>Why / How they Robert F Kennedy:</a:t>
+              <a:t>Why / How they Rudolf Diesel:</a:t>
             </a:r>
           </a:p>
         </p:txBody>
@@ -26374,7 +26374,7 @@
                   <a:schemeClr val="lt1"/>
                 </a:solidFill>
               </a:rPr>
-              <a:t>Robert F Kennedy</a:t>
+              <a:t>Rudolf Diesel</a:t>
             </a:r>
             <a:endParaRPr sz="3200" b="0" i="0" u="none" strike="noStrike" cap="none" dirty="0">
               <a:solidFill>
@@ -26444,7 +26444,7 @@
                   <a:schemeClr val="lt1"/>
                 </a:solidFill>
               </a:rPr>
-              <a:t>Dead at Age 42</a:t>
+              <a:t>Dead at Age 55</a:t>
             </a:r>
             <a:endParaRPr sz="2000" b="0" i="0" u="none" strike="noStrike" cap="none" dirty="0">
               <a:solidFill>
@@ -26498,7 +26498,7 @@
               <a:buChar char="•"/>
             </a:pPr>
             <a:r>
-              <a:t>U.S. Senator and presidential candidate ASSASSINATED at age 42 in Los Angeles — June 1968.</a:t>
+              <a:t>Inventor of the DIESEL ENGINE who VANISHED from a ship crossing the English Channel in 1913.</a:t>
             </a:r>
           </a:p>
           <a:p>
@@ -26510,7 +26510,7 @@
               <a:buChar char="•"/>
             </a:pPr>
             <a:r>
-              <a:t>Dean Warwick claimed he was about to name RFK's real killer on stage — then COLLAPSED and DIED mid-sentence.</a:t>
+              <a:t>His body was found floating in the sea days later — but was too decomposed for autopsy.</a:t>
             </a:r>
           </a:p>
           <a:p>
@@ -26522,7 +26522,7 @@
               <a:buChar char="•"/>
             </a:pPr>
             <a:r>
-              <a:t>The official story blames Sirhan Sirhan — but forensic evidence suggests shots from behind, where Sirhan was not.</a:t>
+              <a:t>Was on his way to England to discuss licensing his engine to the British Navy.</a:t>
             </a:r>
           </a:p>
           <a:p>
@@ -26534,7 +26534,7 @@
               <a:buChar char="•"/>
             </a:pPr>
             <a:r>
-              <a:t>Some researchers connect his assassination to his potential access to classified UFO programs had he become president.</a:t>
+              <a:t>Multiple parties had motive: oil companies, coal interests, and rival nations.</a:t>
             </a:r>
           </a:p>
           <a:p>
@@ -26546,14 +26546,14 @@
               <a:buChar char="•"/>
             </a:pPr>
             <a:r>
-              <a:t>His brother JFK was killed five years earlier — two Kennedys, both assassinated during the peak of UFO secrecy.</a:t>
+              <a:t>The most famous inventor disappearance in history — and the first to demonstrate the inventor-death pattern.</a:t>
             </a:r>
           </a:p>
         </p:txBody>
       </p:sp>
       <p:pic>
         <p:nvPicPr>
-          <p:cNvPr id="16" name="Picture 15" descr="Robert_F_Kennedy.jpg"/>
+          <p:cNvPr id="16" name="Picture 15" descr="Rudolf_Diesel.jpg"/>
           <p:cNvPicPr>
             <a:picLocks noChangeAspect="1"/>
           </p:cNvPicPr>
@@ -26567,8 +26567,8 @@
         </p:blipFill>
         <p:spPr>
           <a:xfrm>
-            <a:off x="8077557" y="1100088"/>
-            <a:ext cx="3126851" cy="3884876"/>
+            <a:off x="8184154" y="1100088"/>
+            <a:ext cx="2913657" cy="3884876"/>
           </a:xfrm>
           <a:prstGeom prst="rect">
             <a:avLst/>
@@ -26600,464 +26600,9 @@
           <a:chExt cx="0" cy="0"/>
         </a:xfrm>
       </p:grpSpPr>
-      <p:sp>
-        <p:nvSpPr>
-          <p:cNvPr id="15" name="TextBox 14">
-            <a:extLst>
-              <a:ext uri="{FF2B5EF4-FFF2-40B4-BE49-F238E27FC236}">
-                <a16:creationId xmlns:a16="http://schemas.microsoft.com/office/drawing/2014/main" id="{E478240E-251B-5BA6-3C45-7E6620400769}"/>
-              </a:ext>
-            </a:extLst>
-          </p:cNvPr>
-          <p:cNvSpPr txBox="1"/>
-          <p:nvPr/>
-        </p:nvSpPr>
-        <p:spPr>
-          <a:xfrm>
-            <a:off x="312432" y="1288262"/>
-            <a:ext cx="6494294" cy="584775"/>
-          </a:xfrm>
-          <a:prstGeom prst="rect">
-            <a:avLst/>
-          </a:prstGeom>
-          <a:solidFill>
-            <a:schemeClr val="bg1">
-              <a:alpha val="84400"/>
-            </a:schemeClr>
-          </a:solidFill>
-        </p:spPr>
-        <p:txBody>
-          <a:bodyPr wrap="square" rtlCol="0">
-            <a:spAutoFit/>
-          </a:bodyPr>
-          <a:lstStyle/>
-          <a:p>
-            <a:r>
-              <a:rPr lang="en-US" sz="3200" b="1" dirty="0">
-                <a:solidFill>
-                  <a:schemeClr val="accent5"/>
-                </a:solidFill>
-              </a:rPr>
-              <a:t>Why / How they Rudolf Diesel:</a:t>
-            </a:r>
-          </a:p>
-        </p:txBody>
-      </p:sp>
-      <p:sp>
-        <p:nvSpPr>
-          <p:cNvPr id="3" name="Google Shape;170;p31">
-            <a:extLst>
-              <a:ext uri="{FF2B5EF4-FFF2-40B4-BE49-F238E27FC236}">
-                <a16:creationId xmlns:a16="http://schemas.microsoft.com/office/drawing/2014/main" id="{A4695FE5-0AA5-AB05-98B1-B5B8E3FA8CBE}"/>
-              </a:ext>
-            </a:extLst>
-          </p:cNvPr>
-          <p:cNvSpPr/>
-          <p:nvPr/>
-        </p:nvSpPr>
-        <p:spPr>
-          <a:xfrm>
-            <a:off x="191731" y="5732890"/>
-            <a:ext cx="3431270" cy="496760"/>
-          </a:xfrm>
-          <a:prstGeom prst="rect">
-            <a:avLst/>
-          </a:prstGeom>
-          <a:solidFill>
-            <a:schemeClr val="accent5"/>
-          </a:solidFill>
-          <a:ln>
-            <a:noFill/>
-          </a:ln>
-        </p:spPr>
-        <p:txBody>
-          <a:bodyPr spcFirstLastPara="1" wrap="square" lIns="91425" tIns="45700" rIns="91425" bIns="45700" anchor="ctr" anchorCtr="0">
-            <a:noAutofit/>
-          </a:bodyPr>
-          <a:lstStyle/>
-          <a:p>
-            <a:pPr marL="0" marR="0" lvl="0" indent="0" algn="ctr" rtl="0">
-              <a:lnSpc>
-                <a:spcPct val="100000"/>
-              </a:lnSpc>
-              <a:spcBef>
-                <a:spcPts val="0"/>
-              </a:spcBef>
-              <a:spcAft>
-                <a:spcPts val="0"/>
-              </a:spcAft>
-              <a:buClr>
-                <a:srgbClr val="000000"/>
-              </a:buClr>
-              <a:buSzPts val="1600"/>
-              <a:buFont typeface="Arial"/>
-              <a:buNone/>
-            </a:pPr>
-            <a:r>
-              <a:rPr lang="en-US" sz="3600" dirty="0">
-                <a:solidFill>
-                  <a:schemeClr val="lt1"/>
-                </a:solidFill>
-              </a:rPr>
-              <a:t>Read List Here:</a:t>
-            </a:r>
-            <a:endParaRPr sz="2000" b="0" i="0" u="none" strike="noStrike" cap="none" dirty="0">
-              <a:solidFill>
-                <a:srgbClr val="000000"/>
-              </a:solidFill>
-              <a:latin typeface="Arial"/>
-              <a:ea typeface="Arial"/>
-              <a:cs typeface="Arial"/>
-              <a:sym typeface="Arial"/>
-            </a:endParaRPr>
-          </a:p>
-        </p:txBody>
-      </p:sp>
-      <p:sp>
-        <p:nvSpPr>
-          <p:cNvPr id="5" name="Google Shape;170;p31">
-            <a:extLst>
-              <a:ext uri="{FF2B5EF4-FFF2-40B4-BE49-F238E27FC236}">
-                <a16:creationId xmlns:a16="http://schemas.microsoft.com/office/drawing/2014/main" id="{98132413-6ED2-8B36-74B6-3C503B1A4634}"/>
-              </a:ext>
-            </a:extLst>
-          </p:cNvPr>
-          <p:cNvSpPr/>
-          <p:nvPr/>
-        </p:nvSpPr>
-        <p:spPr>
-          <a:xfrm>
-            <a:off x="0" y="-31518"/>
-            <a:ext cx="12192000" cy="1131606"/>
-          </a:xfrm>
-          <a:prstGeom prst="rect">
-            <a:avLst/>
-          </a:prstGeom>
-          <a:solidFill>
-            <a:srgbClr val="C00000"/>
-          </a:solidFill>
-          <a:ln>
-            <a:noFill/>
-          </a:ln>
-        </p:spPr>
-        <p:txBody>
-          <a:bodyPr spcFirstLastPara="1" wrap="square" lIns="91425" tIns="45700" rIns="91425" bIns="45700" anchor="ctr" anchorCtr="0">
-            <a:noAutofit/>
-          </a:bodyPr>
-          <a:lstStyle/>
-          <a:p>
-            <a:pPr marL="0" marR="0" lvl="0" indent="0" rtl="0">
-              <a:lnSpc>
-                <a:spcPct val="100000"/>
-              </a:lnSpc>
-              <a:spcBef>
-                <a:spcPts val="0"/>
-              </a:spcBef>
-              <a:spcAft>
-                <a:spcPts val="0"/>
-              </a:spcAft>
-              <a:buClr>
-                <a:srgbClr val="000000"/>
-              </a:buClr>
-              <a:buSzPts val="1600"/>
-              <a:buFont typeface="Arial"/>
-              <a:buNone/>
-            </a:pPr>
-            <a:r>
-              <a:rPr lang="en-US" sz="4800" dirty="0">
-                <a:solidFill>
-                  <a:schemeClr val="lt1"/>
-                </a:solidFill>
-              </a:rPr>
-              <a:t> 80+ Murdered: UAP Experts Exposed</a:t>
-            </a:r>
-            <a:endParaRPr sz="3200" b="0" i="0" u="none" strike="noStrike" cap="none" dirty="0">
-              <a:solidFill>
-                <a:srgbClr val="000000"/>
-              </a:solidFill>
-              <a:latin typeface="Arial"/>
-              <a:ea typeface="Arial"/>
-              <a:cs typeface="Arial"/>
-              <a:sym typeface="Arial"/>
-            </a:endParaRPr>
-          </a:p>
-        </p:txBody>
-      </p:sp>
-      <p:sp>
-        <p:nvSpPr>
-          <p:cNvPr id="4" name="TextBox 3">
-            <a:extLst>
-              <a:ext uri="{FF2B5EF4-FFF2-40B4-BE49-F238E27FC236}">
-                <a16:creationId xmlns:a16="http://schemas.microsoft.com/office/drawing/2014/main" id="{50D7621F-9D36-7894-7117-9F831EF5EFA6}"/>
-              </a:ext>
-            </a:extLst>
-          </p:cNvPr>
-          <p:cNvSpPr txBox="1"/>
-          <p:nvPr/>
-        </p:nvSpPr>
-        <p:spPr>
-          <a:xfrm>
-            <a:off x="107300" y="6229650"/>
-            <a:ext cx="11685989" cy="461665"/>
-          </a:xfrm>
-          <a:prstGeom prst="rect">
-            <a:avLst/>
-          </a:prstGeom>
-          <a:solidFill>
-            <a:schemeClr val="bg1">
-              <a:alpha val="84400"/>
-            </a:schemeClr>
-          </a:solidFill>
-        </p:spPr>
-        <p:txBody>
-          <a:bodyPr wrap="square" rtlCol="0">
-            <a:spAutoFit/>
-          </a:bodyPr>
-          <a:lstStyle/>
-          <a:p>
-            <a:r>
-              <a:rPr lang="en-US" sz="2400" dirty="0"/>
-              <a:t>https://uapmurders.com/uaps</a:t>
-            </a:r>
-          </a:p>
-        </p:txBody>
-      </p:sp>
-      <p:sp>
-        <p:nvSpPr>
-          <p:cNvPr id="7" name="Google Shape;170;p31">
-            <a:extLst>
-              <a:ext uri="{FF2B5EF4-FFF2-40B4-BE49-F238E27FC236}">
-                <a16:creationId xmlns:a16="http://schemas.microsoft.com/office/drawing/2014/main" id="{4B582382-76AA-B49E-C611-39A37CE591B9}"/>
-              </a:ext>
-            </a:extLst>
-          </p:cNvPr>
-          <p:cNvSpPr/>
-          <p:nvPr/>
-        </p:nvSpPr>
-        <p:spPr>
-          <a:xfrm>
-            <a:off x="7506336" y="4925186"/>
-            <a:ext cx="4550222" cy="869505"/>
-          </a:xfrm>
-          <a:prstGeom prst="rect">
-            <a:avLst/>
-          </a:prstGeom>
-          <a:solidFill>
-            <a:srgbClr val="C00000"/>
-          </a:solidFill>
-          <a:ln>
-            <a:noFill/>
-          </a:ln>
-        </p:spPr>
-        <p:txBody>
-          <a:bodyPr spcFirstLastPara="1" wrap="square" lIns="91425" tIns="45700" rIns="91425" bIns="45700" anchor="ctr" anchorCtr="0">
-            <a:noAutofit/>
-          </a:bodyPr>
-          <a:lstStyle/>
-          <a:p>
-            <a:pPr marL="0" marR="0" lvl="0" indent="0" algn="ctr" rtl="0">
-              <a:lnSpc>
-                <a:spcPct val="100000"/>
-              </a:lnSpc>
-              <a:spcBef>
-                <a:spcPts val="0"/>
-              </a:spcBef>
-              <a:spcAft>
-                <a:spcPts val="0"/>
-              </a:spcAft>
-              <a:buClr>
-                <a:srgbClr val="000000"/>
-              </a:buClr>
-              <a:buSzPts val="1600"/>
-              <a:buFont typeface="Arial"/>
-              <a:buNone/>
-            </a:pPr>
-            <a:r>
-              <a:rPr lang="en-US" sz="4800" dirty="0">
-                <a:solidFill>
-                  <a:schemeClr val="lt1"/>
-                </a:solidFill>
-              </a:rPr>
-              <a:t>Rudolf Diesel</a:t>
-            </a:r>
-            <a:endParaRPr sz="3200" b="0" i="0" u="none" strike="noStrike" cap="none" dirty="0">
-              <a:solidFill>
-                <a:srgbClr val="000000"/>
-              </a:solidFill>
-              <a:latin typeface="Arial"/>
-              <a:ea typeface="Arial"/>
-              <a:cs typeface="Arial"/>
-              <a:sym typeface="Arial"/>
-            </a:endParaRPr>
-          </a:p>
-        </p:txBody>
-      </p:sp>
-      <p:sp>
-        <p:nvSpPr>
-          <p:cNvPr id="8" name="Google Shape;170;p31">
-            <a:extLst>
-              <a:ext uri="{FF2B5EF4-FFF2-40B4-BE49-F238E27FC236}">
-                <a16:creationId xmlns:a16="http://schemas.microsoft.com/office/drawing/2014/main" id="{D328ABDE-E232-3EB7-C3F2-B4BB7B64262F}"/>
-              </a:ext>
-            </a:extLst>
-          </p:cNvPr>
-          <p:cNvSpPr/>
-          <p:nvPr/>
-        </p:nvSpPr>
-        <p:spPr>
-          <a:xfrm>
-            <a:off x="7526107" y="5681420"/>
-            <a:ext cx="4550222" cy="548230"/>
-          </a:xfrm>
-          <a:prstGeom prst="rect">
-            <a:avLst/>
-          </a:prstGeom>
-          <a:solidFill>
-            <a:srgbClr val="C00000"/>
-          </a:solidFill>
-          <a:ln>
-            <a:noFill/>
-          </a:ln>
-        </p:spPr>
-        <p:txBody>
-          <a:bodyPr spcFirstLastPara="1" wrap="square" lIns="91425" tIns="45700" rIns="91425" bIns="45700" anchor="ctr" anchorCtr="0">
-            <a:noAutofit/>
-          </a:bodyPr>
-          <a:lstStyle/>
-          <a:p>
-            <a:pPr marL="0" marR="0" lvl="0" indent="0" algn="ctr" rtl="0">
-              <a:lnSpc>
-                <a:spcPct val="100000"/>
-              </a:lnSpc>
-              <a:spcBef>
-                <a:spcPts val="0"/>
-              </a:spcBef>
-              <a:spcAft>
-                <a:spcPts val="0"/>
-              </a:spcAft>
-              <a:buClr>
-                <a:srgbClr val="000000"/>
-              </a:buClr>
-              <a:buSzPts val="1600"/>
-              <a:buFont typeface="Arial"/>
-              <a:buNone/>
-            </a:pPr>
-            <a:r>
-              <a:rPr lang="en-US" sz="3600" dirty="0">
-                <a:solidFill>
-                  <a:schemeClr val="lt1"/>
-                </a:solidFill>
-              </a:rPr>
-              <a:t>Dead at Age 55</a:t>
-            </a:r>
-            <a:endParaRPr sz="2000" b="0" i="0" u="none" strike="noStrike" cap="none" dirty="0">
-              <a:solidFill>
-                <a:srgbClr val="000000"/>
-              </a:solidFill>
-              <a:latin typeface="Arial"/>
-              <a:ea typeface="Arial"/>
-              <a:cs typeface="Arial"/>
-              <a:sym typeface="Arial"/>
-            </a:endParaRPr>
-          </a:p>
-        </p:txBody>
-      </p:sp>
-      <p:sp>
-        <p:nvSpPr>
-          <p:cNvPr id="10" name="TextBox 9">
-            <a:extLst>
-              <a:ext uri="{FF2B5EF4-FFF2-40B4-BE49-F238E27FC236}">
-                <a16:creationId xmlns:a16="http://schemas.microsoft.com/office/drawing/2014/main" id="{5FA0D8B2-6B55-D3DC-BCBB-6FEAD86B9E72}"/>
-              </a:ext>
-            </a:extLst>
-          </p:cNvPr>
-          <p:cNvSpPr txBox="1"/>
-          <p:nvPr/>
-        </p:nvSpPr>
-        <p:spPr>
-          <a:xfrm>
-            <a:off x="312431" y="2175372"/>
-            <a:ext cx="6987941" cy="3046988"/>
-          </a:xfrm>
-          <a:prstGeom prst="rect">
-            <a:avLst/>
-          </a:prstGeom>
-          <a:solidFill>
-            <a:schemeClr val="bg1">
-              <a:alpha val="84400"/>
-            </a:schemeClr>
-          </a:solidFill>
-        </p:spPr>
-        <p:txBody>
-          <a:bodyPr wrap="square" rtlCol="0">
-            <a:spAutoFit/>
-          </a:bodyPr>
-          <a:lstStyle/>
-          <a:p>
-            <a:pPr marL="285750" indent="-285750">
-              <a:spcBef>
-                <a:spcPts val="1200"/>
-              </a:spcBef>
-              <a:buFont typeface="Arial" panose="020B0604020202020204" pitchFamily="34" charset="0"/>
-              <a:buChar char="•"/>
-            </a:pPr>
-            <a:r>
-              <a:t>Inventor of the DIESEL ENGINE who VANISHED from a ship crossing the English Channel in 1913.</a:t>
-            </a:r>
-          </a:p>
-          <a:p>
-            <a:pPr marL="285750" indent="-285750">
-              <a:spcBef>
-                <a:spcPts val="1200"/>
-              </a:spcBef>
-              <a:buFont typeface="Arial" panose="020B0604020202020204" pitchFamily="34" charset="0"/>
-              <a:buChar char="•"/>
-            </a:pPr>
-            <a:r>
-              <a:t>His body was found floating in the sea days later — but was too decomposed for autopsy.</a:t>
-            </a:r>
-          </a:p>
-          <a:p>
-            <a:pPr marL="285750" indent="-285750">
-              <a:spcBef>
-                <a:spcPts val="1200"/>
-              </a:spcBef>
-              <a:buFont typeface="Arial" panose="020B0604020202020204" pitchFamily="34" charset="0"/>
-              <a:buChar char="•"/>
-            </a:pPr>
-            <a:r>
-              <a:t>Was on his way to England to discuss licensing his engine to the British Navy.</a:t>
-            </a:r>
-          </a:p>
-          <a:p>
-            <a:pPr marL="285750" indent="-285750">
-              <a:spcBef>
-                <a:spcPts val="1200"/>
-              </a:spcBef>
-              <a:buFont typeface="Arial" panose="020B0604020202020204" pitchFamily="34" charset="0"/>
-              <a:buChar char="•"/>
-            </a:pPr>
-            <a:r>
-              <a:t>Multiple parties had motive: oil companies, coal interests, and rival nations.</a:t>
-            </a:r>
-          </a:p>
-          <a:p>
-            <a:pPr marL="285750" indent="-285750">
-              <a:spcBef>
-                <a:spcPts val="1200"/>
-              </a:spcBef>
-              <a:buFont typeface="Arial" panose="020B0604020202020204" pitchFamily="34" charset="0"/>
-              <a:buChar char="•"/>
-            </a:pPr>
-            <a:r>
-              <a:t>The most famous inventor disappearance in history — and the first to demonstrate the inventor-death pattern.</a:t>
-            </a:r>
-          </a:p>
-        </p:txBody>
-      </p:sp>
       <p:pic>
         <p:nvPicPr>
-          <p:cNvPr id="16" name="Picture 15" descr="Rudolf_Diesel.jpg"/>
+          <p:cNvPr id="16" name="Picture 15" descr="Frank_Edwards.jpg"/>
           <p:cNvPicPr>
             <a:picLocks noChangeAspect="1"/>
           </p:cNvPicPr>
@@ -27071,14 +26616,474 @@
         </p:blipFill>
         <p:spPr>
           <a:xfrm>
-            <a:off x="8184154" y="1100088"/>
-            <a:ext cx="2913657" cy="3884876"/>
+            <a:off x="8708474" y="1100088"/>
+            <a:ext cx="3357970" cy="4290740"/>
           </a:xfrm>
           <a:prstGeom prst="rect">
             <a:avLst/>
           </a:prstGeom>
         </p:spPr>
       </p:pic>
+      <p:sp>
+        <p:nvSpPr>
+          <p:cNvPr id="15" name="TextBox 14">
+            <a:extLst>
+              <a:ext uri="{FF2B5EF4-FFF2-40B4-BE49-F238E27FC236}">
+                <a16:creationId xmlns:a16="http://schemas.microsoft.com/office/drawing/2014/main" id="{E478240E-251B-5BA6-3C45-7E6620400769}"/>
+              </a:ext>
+            </a:extLst>
+          </p:cNvPr>
+          <p:cNvSpPr txBox="1"/>
+          <p:nvPr/>
+        </p:nvSpPr>
+        <p:spPr>
+          <a:xfrm>
+            <a:off x="312432" y="1288262"/>
+            <a:ext cx="6494294" cy="584775"/>
+          </a:xfrm>
+          <a:prstGeom prst="rect">
+            <a:avLst/>
+          </a:prstGeom>
+          <a:solidFill>
+            <a:schemeClr val="bg1">
+              <a:alpha val="84400"/>
+            </a:schemeClr>
+          </a:solidFill>
+        </p:spPr>
+        <p:txBody>
+          <a:bodyPr wrap="square" rtlCol="0">
+            <a:spAutoFit/>
+          </a:bodyPr>
+          <a:lstStyle/>
+          <a:p>
+            <a:r>
+              <a:rPr lang="en-US" sz="3200" b="1" dirty="0">
+                <a:solidFill>
+                  <a:schemeClr val="accent5"/>
+                </a:solidFill>
+              </a:rPr>
+              <a:t>Why / How they Frank Edwards:</a:t>
+            </a:r>
+          </a:p>
+        </p:txBody>
+      </p:sp>
+      <p:sp>
+        <p:nvSpPr>
+          <p:cNvPr id="3" name="Google Shape;170;p31">
+            <a:extLst>
+              <a:ext uri="{FF2B5EF4-FFF2-40B4-BE49-F238E27FC236}">
+                <a16:creationId xmlns:a16="http://schemas.microsoft.com/office/drawing/2014/main" id="{A4695FE5-0AA5-AB05-98B1-B5B8E3FA8CBE}"/>
+              </a:ext>
+            </a:extLst>
+          </p:cNvPr>
+          <p:cNvSpPr/>
+          <p:nvPr/>
+        </p:nvSpPr>
+        <p:spPr>
+          <a:xfrm>
+            <a:off x="191731" y="5732890"/>
+            <a:ext cx="3431270" cy="496760"/>
+          </a:xfrm>
+          <a:prstGeom prst="rect">
+            <a:avLst/>
+          </a:prstGeom>
+          <a:solidFill>
+            <a:schemeClr val="accent5"/>
+          </a:solidFill>
+          <a:ln>
+            <a:noFill/>
+          </a:ln>
+        </p:spPr>
+        <p:txBody>
+          <a:bodyPr spcFirstLastPara="1" wrap="square" lIns="91425" tIns="45700" rIns="91425" bIns="45700" anchor="ctr" anchorCtr="0">
+            <a:noAutofit/>
+          </a:bodyPr>
+          <a:lstStyle/>
+          <a:p>
+            <a:pPr marL="0" marR="0" lvl="0" indent="0" algn="ctr" rtl="0">
+              <a:lnSpc>
+                <a:spcPct val="100000"/>
+              </a:lnSpc>
+              <a:spcBef>
+                <a:spcPts val="0"/>
+              </a:spcBef>
+              <a:spcAft>
+                <a:spcPts val="0"/>
+              </a:spcAft>
+              <a:buClr>
+                <a:srgbClr val="000000"/>
+              </a:buClr>
+              <a:buSzPts val="1600"/>
+              <a:buFont typeface="Arial"/>
+              <a:buNone/>
+            </a:pPr>
+            <a:r>
+              <a:rPr lang="en-US" sz="3600" dirty="0">
+                <a:solidFill>
+                  <a:schemeClr val="lt1"/>
+                </a:solidFill>
+              </a:rPr>
+              <a:t>Read List Here:</a:t>
+            </a:r>
+            <a:endParaRPr sz="2000" b="0" i="0" u="none" strike="noStrike" cap="none" dirty="0">
+              <a:solidFill>
+                <a:srgbClr val="000000"/>
+              </a:solidFill>
+              <a:latin typeface="Arial"/>
+              <a:ea typeface="Arial"/>
+              <a:cs typeface="Arial"/>
+              <a:sym typeface="Arial"/>
+            </a:endParaRPr>
+          </a:p>
+        </p:txBody>
+      </p:sp>
+      <p:sp>
+        <p:nvSpPr>
+          <p:cNvPr id="5" name="Google Shape;170;p31">
+            <a:extLst>
+              <a:ext uri="{FF2B5EF4-FFF2-40B4-BE49-F238E27FC236}">
+                <a16:creationId xmlns:a16="http://schemas.microsoft.com/office/drawing/2014/main" id="{98132413-6ED2-8B36-74B6-3C503B1A4634}"/>
+              </a:ext>
+            </a:extLst>
+          </p:cNvPr>
+          <p:cNvSpPr/>
+          <p:nvPr/>
+        </p:nvSpPr>
+        <p:spPr>
+          <a:xfrm>
+            <a:off x="0" y="-31518"/>
+            <a:ext cx="12192000" cy="1131606"/>
+          </a:xfrm>
+          <a:prstGeom prst="rect">
+            <a:avLst/>
+          </a:prstGeom>
+          <a:solidFill>
+            <a:srgbClr val="C00000"/>
+          </a:solidFill>
+          <a:ln>
+            <a:noFill/>
+          </a:ln>
+        </p:spPr>
+        <p:txBody>
+          <a:bodyPr spcFirstLastPara="1" wrap="square" lIns="91425" tIns="45700" rIns="91425" bIns="45700" anchor="ctr" anchorCtr="0">
+            <a:noAutofit/>
+          </a:bodyPr>
+          <a:lstStyle/>
+          <a:p>
+            <a:pPr marL="0" marR="0" lvl="0" indent="0" rtl="0">
+              <a:lnSpc>
+                <a:spcPct val="100000"/>
+              </a:lnSpc>
+              <a:spcBef>
+                <a:spcPts val="0"/>
+              </a:spcBef>
+              <a:spcAft>
+                <a:spcPts val="0"/>
+              </a:spcAft>
+              <a:buClr>
+                <a:srgbClr val="000000"/>
+              </a:buClr>
+              <a:buSzPts val="1600"/>
+              <a:buFont typeface="Arial"/>
+              <a:buNone/>
+            </a:pPr>
+            <a:r>
+              <a:rPr lang="en-US" sz="4800" dirty="0">
+                <a:solidFill>
+                  <a:schemeClr val="lt1"/>
+                </a:solidFill>
+              </a:rPr>
+              <a:t> 60+ Murdered: Energy Inventors Silenced</a:t>
+            </a:r>
+            <a:endParaRPr sz="3200" b="0" i="0" u="none" strike="noStrike" cap="none" dirty="0">
+              <a:solidFill>
+                <a:srgbClr val="000000"/>
+              </a:solidFill>
+              <a:latin typeface="Arial"/>
+              <a:ea typeface="Arial"/>
+              <a:cs typeface="Arial"/>
+              <a:sym typeface="Arial"/>
+            </a:endParaRPr>
+          </a:p>
+        </p:txBody>
+      </p:sp>
+      <p:sp>
+        <p:nvSpPr>
+          <p:cNvPr id="4" name="TextBox 3">
+            <a:extLst>
+              <a:ext uri="{FF2B5EF4-FFF2-40B4-BE49-F238E27FC236}">
+                <a16:creationId xmlns:a16="http://schemas.microsoft.com/office/drawing/2014/main" id="{50D7621F-9D36-7894-7117-9F831EF5EFA6}"/>
+              </a:ext>
+            </a:extLst>
+          </p:cNvPr>
+          <p:cNvSpPr txBox="1"/>
+          <p:nvPr/>
+        </p:nvSpPr>
+        <p:spPr>
+          <a:xfrm>
+            <a:off x="107300" y="6229650"/>
+            <a:ext cx="11685989" cy="461665"/>
+          </a:xfrm>
+          <a:prstGeom prst="rect">
+            <a:avLst/>
+          </a:prstGeom>
+          <a:solidFill>
+            <a:schemeClr val="bg1">
+              <a:alpha val="84400"/>
+            </a:schemeClr>
+          </a:solidFill>
+        </p:spPr>
+        <p:txBody>
+          <a:bodyPr wrap="square" rtlCol="0">
+            <a:spAutoFit/>
+          </a:bodyPr>
+          <a:lstStyle/>
+          <a:p>
+            <a:r>
+              <a:rPr lang="en-US" sz="2400" dirty="0"/>
+              <a:t>https://uapmurders.com/energy</a:t>
+            </a:r>
+          </a:p>
+        </p:txBody>
+      </p:sp>
+      <p:sp>
+        <p:nvSpPr>
+          <p:cNvPr id="10" name="TextBox 9">
+            <a:extLst>
+              <a:ext uri="{FF2B5EF4-FFF2-40B4-BE49-F238E27FC236}">
+                <a16:creationId xmlns:a16="http://schemas.microsoft.com/office/drawing/2014/main" id="{5FA0D8B2-6B55-D3DC-BCBB-6FEAD86B9E72}"/>
+              </a:ext>
+            </a:extLst>
+          </p:cNvPr>
+          <p:cNvSpPr txBox="1"/>
+          <p:nvPr/>
+        </p:nvSpPr>
+        <p:spPr>
+          <a:xfrm>
+            <a:off x="107300" y="1912953"/>
+            <a:ext cx="8163523" cy="3477875"/>
+          </a:xfrm>
+          <a:prstGeom prst="rect">
+            <a:avLst/>
+          </a:prstGeom>
+          <a:solidFill>
+            <a:schemeClr val="bg1">
+              <a:alpha val="84400"/>
+            </a:schemeClr>
+          </a:solidFill>
+        </p:spPr>
+        <p:txBody>
+          <a:bodyPr wrap="square" rtlCol="0">
+            <a:spAutoFit/>
+          </a:bodyPr>
+          <a:lstStyle/>
+          <a:p>
+            <a:pPr marL="285750" indent="-285750">
+              <a:spcBef>
+                <a:spcPts val="1200"/>
+              </a:spcBef>
+              <a:buFont typeface="Arial" panose="020B0604020202020204" pitchFamily="34" charset="0"/>
+              <a:buChar char="•"/>
+            </a:pPr>
+            <a:r>
+              <a:rPr dirty="0"/>
+              <a:t>Prominent UFO author and radio broadcaster — DIED of a heart attack at age 59.</a:t>
+            </a:r>
+          </a:p>
+          <a:p>
+            <a:pPr marL="285750" indent="-285750">
+              <a:spcBef>
+                <a:spcPts val="1200"/>
+              </a:spcBef>
+              <a:buFont typeface="Arial" panose="020B0604020202020204" pitchFamily="34" charset="0"/>
+              <a:buChar char="•"/>
+            </a:pPr>
+            <a:r>
+              <a:rPr dirty="0"/>
+              <a:t>Died on the EXACT 20th anniversary of Kenneth Arnold's 1947 sighting — the event that launched the UFO era.</a:t>
+            </a:r>
+          </a:p>
+          <a:p>
+            <a:pPr marL="285750" indent="-285750">
+              <a:spcBef>
+                <a:spcPts val="1200"/>
+              </a:spcBef>
+              <a:buFont typeface="Arial" panose="020B0604020202020204" pitchFamily="34" charset="0"/>
+              <a:buChar char="•"/>
+            </a:pPr>
+            <a:r>
+              <a:rPr dirty="0"/>
+              <a:t>Bestselling books, national radio audience, one of the most influential early UFO researchers.</a:t>
+            </a:r>
+          </a:p>
+          <a:p>
+            <a:pPr marL="285750" indent="-285750">
+              <a:spcBef>
+                <a:spcPts val="1200"/>
+              </a:spcBef>
+              <a:buFont typeface="Arial" panose="020B0604020202020204" pitchFamily="34" charset="0"/>
+              <a:buChar char="•"/>
+            </a:pPr>
+            <a:r>
+              <a:rPr dirty="0"/>
+              <a:t>Heart attack on the most symbolically significant date in UFO history. Coincidence? At 59?</a:t>
+            </a:r>
+          </a:p>
+          <a:p>
+            <a:pPr marL="285750" indent="-285750">
+              <a:spcBef>
+                <a:spcPts val="1200"/>
+              </a:spcBef>
+              <a:buFont typeface="Arial" panose="020B0604020202020204" pitchFamily="34" charset="0"/>
+              <a:buChar char="•"/>
+            </a:pPr>
+            <a:r>
+              <a:rPr dirty="0"/>
+              <a:t>His death came during a period when multiple early UFO researchers died or were SILENCED.</a:t>
+            </a:r>
+          </a:p>
+        </p:txBody>
+      </p:sp>
+      <p:sp>
+        <p:nvSpPr>
+          <p:cNvPr id="7" name="Google Shape;170;p31">
+            <a:extLst>
+              <a:ext uri="{FF2B5EF4-FFF2-40B4-BE49-F238E27FC236}">
+                <a16:creationId xmlns:a16="http://schemas.microsoft.com/office/drawing/2014/main" id="{4B582382-76AA-B49E-C611-39A37CE591B9}"/>
+              </a:ext>
+            </a:extLst>
+          </p:cNvPr>
+          <p:cNvSpPr/>
+          <p:nvPr/>
+        </p:nvSpPr>
+        <p:spPr>
+          <a:xfrm>
+            <a:off x="7514707" y="5331050"/>
+            <a:ext cx="4550222" cy="869505"/>
+          </a:xfrm>
+          <a:prstGeom prst="rect">
+            <a:avLst/>
+          </a:prstGeom>
+          <a:solidFill>
+            <a:srgbClr val="C00000"/>
+          </a:solidFill>
+          <a:ln>
+            <a:noFill/>
+          </a:ln>
+        </p:spPr>
+        <p:txBody>
+          <a:bodyPr spcFirstLastPara="1" wrap="square" lIns="91425" tIns="45700" rIns="91425" bIns="45700" anchor="ctr" anchorCtr="0">
+            <a:noAutofit/>
+          </a:bodyPr>
+          <a:lstStyle/>
+          <a:p>
+            <a:pPr marL="0" marR="0" lvl="0" indent="0" algn="ctr" rtl="0">
+              <a:lnSpc>
+                <a:spcPct val="100000"/>
+              </a:lnSpc>
+              <a:spcBef>
+                <a:spcPts val="0"/>
+              </a:spcBef>
+              <a:spcAft>
+                <a:spcPts val="0"/>
+              </a:spcAft>
+              <a:buClr>
+                <a:srgbClr val="000000"/>
+              </a:buClr>
+              <a:buSzPts val="1600"/>
+              <a:buFont typeface="Arial"/>
+              <a:buNone/>
+            </a:pPr>
+            <a:r>
+              <a:rPr lang="en-US" sz="4800" dirty="0">
+                <a:solidFill>
+                  <a:schemeClr val="lt1"/>
+                </a:solidFill>
+              </a:rPr>
+              <a:t>Frank Edwards</a:t>
+            </a:r>
+            <a:endParaRPr sz="3200" b="0" i="0" u="none" strike="noStrike" cap="none" dirty="0">
+              <a:solidFill>
+                <a:srgbClr val="000000"/>
+              </a:solidFill>
+              <a:latin typeface="Arial"/>
+              <a:ea typeface="Arial"/>
+              <a:cs typeface="Arial"/>
+              <a:sym typeface="Arial"/>
+            </a:endParaRPr>
+          </a:p>
+        </p:txBody>
+      </p:sp>
+      <p:sp>
+        <p:nvSpPr>
+          <p:cNvPr id="8" name="Google Shape;170;p31">
+            <a:extLst>
+              <a:ext uri="{FF2B5EF4-FFF2-40B4-BE49-F238E27FC236}">
+                <a16:creationId xmlns:a16="http://schemas.microsoft.com/office/drawing/2014/main" id="{D328ABDE-E232-3EB7-C3F2-B4BB7B64262F}"/>
+              </a:ext>
+            </a:extLst>
+          </p:cNvPr>
+          <p:cNvSpPr/>
+          <p:nvPr/>
+        </p:nvSpPr>
+        <p:spPr>
+          <a:xfrm>
+            <a:off x="7534478" y="6087284"/>
+            <a:ext cx="4550222" cy="548230"/>
+          </a:xfrm>
+          <a:prstGeom prst="rect">
+            <a:avLst/>
+          </a:prstGeom>
+          <a:solidFill>
+            <a:srgbClr val="C00000"/>
+          </a:solidFill>
+          <a:ln>
+            <a:noFill/>
+          </a:ln>
+        </p:spPr>
+        <p:txBody>
+          <a:bodyPr spcFirstLastPara="1" wrap="square" lIns="91425" tIns="45700" rIns="91425" bIns="45700" anchor="ctr" anchorCtr="0">
+            <a:noAutofit/>
+          </a:bodyPr>
+          <a:lstStyle/>
+          <a:p>
+            <a:pPr marL="0" marR="0" lvl="0" indent="0" algn="ctr" rtl="0">
+              <a:lnSpc>
+                <a:spcPct val="100000"/>
+              </a:lnSpc>
+              <a:spcBef>
+                <a:spcPts val="0"/>
+              </a:spcBef>
+              <a:spcAft>
+                <a:spcPts val="0"/>
+              </a:spcAft>
+              <a:buClr>
+                <a:srgbClr val="000000"/>
+              </a:buClr>
+              <a:buSzPts val="1600"/>
+              <a:buFont typeface="Arial"/>
+              <a:buNone/>
+            </a:pPr>
+            <a:r>
+              <a:rPr lang="en-US" sz="3600" dirty="0">
+                <a:solidFill>
+                  <a:schemeClr val="lt1"/>
+                </a:solidFill>
+              </a:rPr>
+              <a:t>Dead at Age 59</a:t>
+            </a:r>
+            <a:endParaRPr sz="2000" b="0" i="0" u="none" strike="noStrike" cap="none" dirty="0">
+              <a:solidFill>
+                <a:srgbClr val="000000"/>
+              </a:solidFill>
+              <a:latin typeface="Arial"/>
+              <a:ea typeface="Arial"/>
+              <a:cs typeface="Arial"/>
+              <a:sym typeface="Arial"/>
+            </a:endParaRPr>
+          </a:p>
+        </p:txBody>
+      </p:sp>
     </p:spTree>
   </p:cSld>
   <p:clrMapOvr>

--- a/UAPs/UAPs_Murders.pptx
+++ b/UAPs/UAPs_Murders.pptx
@@ -4,6 +4,9 @@
   <p:sldMasterIdLst>
     <p:sldMasterId id="2147483648" r:id="rId1"/>
   </p:sldMasterIdLst>
+  <p:notesMasterIdLst>
+    <p:notesMasterId r:id="rId66"/>
+  </p:notesMasterIdLst>
   <p:sldIdLst>
     <p:sldId id="272" r:id="rId2"/>
     <p:sldId id="340" r:id="rId3"/>
@@ -175,6 +178,3295 @@
 </p:presentation>
 </file>
 
+<file path=ppt/notesMasters/notesMaster1.xml><?xml version="1.0" encoding="utf-8"?>
+<p:notesMaster xmlns:a="http://schemas.openxmlformats.org/drawingml/2006/main" xmlns:r="http://schemas.openxmlformats.org/officeDocument/2006/relationships" xmlns:p="http://schemas.openxmlformats.org/presentationml/2006/main">
+  <p:cSld>
+    <p:bg>
+      <p:bgRef idx="1001">
+        <a:schemeClr val="bg1"/>
+      </p:bgRef>
+    </p:bg>
+    <p:spTree>
+      <p:nvGrpSpPr>
+        <p:cNvPr id="1" name=""/>
+        <p:cNvGrpSpPr/>
+        <p:nvPr/>
+      </p:nvGrpSpPr>
+      <p:grpSpPr>
+        <a:xfrm>
+          <a:off x="0" y="0"/>
+          <a:ext cx="0" cy="0"/>
+          <a:chOff x="0" y="0"/>
+          <a:chExt cx="0" cy="0"/>
+        </a:xfrm>
+      </p:grpSpPr>
+      <p:sp>
+        <p:nvSpPr>
+          <p:cNvPr id="2" name="Header Placeholder 1"/>
+          <p:cNvSpPr>
+            <a:spLocks noGrp="1"/>
+          </p:cNvSpPr>
+          <p:nvPr>
+            <p:ph type="hdr" sz="quarter"/>
+          </p:nvPr>
+        </p:nvSpPr>
+        <p:spPr>
+          <a:xfrm>
+            <a:off x="0" y="0"/>
+            <a:ext cx="2971800" cy="458788"/>
+          </a:xfrm>
+          <a:prstGeom prst="rect">
+            <a:avLst/>
+          </a:prstGeom>
+        </p:spPr>
+        <p:txBody>
+          <a:bodyPr vert="horz" lIns="91440" tIns="45720" rIns="91440" bIns="45720" rtlCol="0"/>
+          <a:lstStyle>
+            <a:lvl1pPr algn="l">
+              <a:defRPr sz="1200"/>
+            </a:lvl1pPr>
+          </a:lstStyle>
+          <a:p>
+            <a:endParaRPr lang="en-US"/>
+          </a:p>
+        </p:txBody>
+      </p:sp>
+      <p:sp>
+        <p:nvSpPr>
+          <p:cNvPr id="3" name="Date Placeholder 2"/>
+          <p:cNvSpPr>
+            <a:spLocks noGrp="1"/>
+          </p:cNvSpPr>
+          <p:nvPr>
+            <p:ph type="dt" idx="1"/>
+          </p:nvPr>
+        </p:nvSpPr>
+        <p:spPr>
+          <a:xfrm>
+            <a:off x="3884613" y="0"/>
+            <a:ext cx="2971800" cy="458788"/>
+          </a:xfrm>
+          <a:prstGeom prst="rect">
+            <a:avLst/>
+          </a:prstGeom>
+        </p:spPr>
+        <p:txBody>
+          <a:bodyPr vert="horz" lIns="91440" tIns="45720" rIns="91440" bIns="45720" rtlCol="0"/>
+          <a:lstStyle>
+            <a:lvl1pPr algn="r">
+              <a:defRPr sz="1200"/>
+            </a:lvl1pPr>
+          </a:lstStyle>
+          <a:p>
+            <a:fld id="{3D1776A1-FCF4-A54D-8F55-BFDE25367522}" type="datetimeFigureOut">
+              <a:rPr lang="en-US" smtClean="0"/>
+              <a:t>3/31/26</a:t>
+            </a:fld>
+            <a:endParaRPr lang="en-US"/>
+          </a:p>
+        </p:txBody>
+      </p:sp>
+      <p:sp>
+        <p:nvSpPr>
+          <p:cNvPr id="4" name="Slide Image Placeholder 3"/>
+          <p:cNvSpPr>
+            <a:spLocks noGrp="1" noRot="1" noChangeAspect="1"/>
+          </p:cNvSpPr>
+          <p:nvPr>
+            <p:ph type="sldImg" idx="2"/>
+          </p:nvPr>
+        </p:nvSpPr>
+        <p:spPr>
+          <a:xfrm>
+            <a:off x="685800" y="1143000"/>
+            <a:ext cx="5486400" cy="3086100"/>
+          </a:xfrm>
+          <a:prstGeom prst="rect">
+            <a:avLst/>
+          </a:prstGeom>
+          <a:noFill/>
+          <a:ln w="12700">
+            <a:solidFill>
+              <a:prstClr val="black"/>
+            </a:solidFill>
+          </a:ln>
+        </p:spPr>
+        <p:txBody>
+          <a:bodyPr vert="horz" lIns="91440" tIns="45720" rIns="91440" bIns="45720" rtlCol="0" anchor="ctr"/>
+          <a:lstStyle/>
+          <a:p>
+            <a:endParaRPr lang="en-US"/>
+          </a:p>
+        </p:txBody>
+      </p:sp>
+      <p:sp>
+        <p:nvSpPr>
+          <p:cNvPr id="5" name="Notes Placeholder 4"/>
+          <p:cNvSpPr>
+            <a:spLocks noGrp="1"/>
+          </p:cNvSpPr>
+          <p:nvPr>
+            <p:ph type="body" sz="quarter" idx="3"/>
+          </p:nvPr>
+        </p:nvSpPr>
+        <p:spPr>
+          <a:xfrm>
+            <a:off x="685800" y="4400550"/>
+            <a:ext cx="5486400" cy="3600450"/>
+          </a:xfrm>
+          <a:prstGeom prst="rect">
+            <a:avLst/>
+          </a:prstGeom>
+        </p:spPr>
+        <p:txBody>
+          <a:bodyPr vert="horz" lIns="91440" tIns="45720" rIns="91440" bIns="45720" rtlCol="0"/>
+          <a:lstStyle/>
+          <a:p>
+            <a:pPr lvl="0"/>
+            <a:r>
+              <a:rPr lang="en-US"/>
+              <a:t>Click to edit Master text styles</a:t>
+            </a:r>
+          </a:p>
+          <a:p>
+            <a:pPr lvl="1"/>
+            <a:r>
+              <a:rPr lang="en-US"/>
+              <a:t>Second level</a:t>
+            </a:r>
+          </a:p>
+          <a:p>
+            <a:pPr lvl="2"/>
+            <a:r>
+              <a:rPr lang="en-US"/>
+              <a:t>Third level</a:t>
+            </a:r>
+          </a:p>
+          <a:p>
+            <a:pPr lvl="3"/>
+            <a:r>
+              <a:rPr lang="en-US"/>
+              <a:t>Fourth level</a:t>
+            </a:r>
+          </a:p>
+          <a:p>
+            <a:pPr lvl="4"/>
+            <a:r>
+              <a:rPr lang="en-US"/>
+              <a:t>Fifth level</a:t>
+            </a:r>
+          </a:p>
+        </p:txBody>
+      </p:sp>
+      <p:sp>
+        <p:nvSpPr>
+          <p:cNvPr id="6" name="Footer Placeholder 5"/>
+          <p:cNvSpPr>
+            <a:spLocks noGrp="1"/>
+          </p:cNvSpPr>
+          <p:nvPr>
+            <p:ph type="ftr" sz="quarter" idx="4"/>
+          </p:nvPr>
+        </p:nvSpPr>
+        <p:spPr>
+          <a:xfrm>
+            <a:off x="0" y="8685213"/>
+            <a:ext cx="2971800" cy="458787"/>
+          </a:xfrm>
+          <a:prstGeom prst="rect">
+            <a:avLst/>
+          </a:prstGeom>
+        </p:spPr>
+        <p:txBody>
+          <a:bodyPr vert="horz" lIns="91440" tIns="45720" rIns="91440" bIns="45720" rtlCol="0" anchor="b"/>
+          <a:lstStyle>
+            <a:lvl1pPr algn="l">
+              <a:defRPr sz="1200"/>
+            </a:lvl1pPr>
+          </a:lstStyle>
+          <a:p>
+            <a:endParaRPr lang="en-US"/>
+          </a:p>
+        </p:txBody>
+      </p:sp>
+      <p:sp>
+        <p:nvSpPr>
+          <p:cNvPr id="7" name="Slide Number Placeholder 6"/>
+          <p:cNvSpPr>
+            <a:spLocks noGrp="1"/>
+          </p:cNvSpPr>
+          <p:nvPr>
+            <p:ph type="sldNum" sz="quarter" idx="5"/>
+          </p:nvPr>
+        </p:nvSpPr>
+        <p:spPr>
+          <a:xfrm>
+            <a:off x="3884613" y="8685213"/>
+            <a:ext cx="2971800" cy="458787"/>
+          </a:xfrm>
+          <a:prstGeom prst="rect">
+            <a:avLst/>
+          </a:prstGeom>
+        </p:spPr>
+        <p:txBody>
+          <a:bodyPr vert="horz" lIns="91440" tIns="45720" rIns="91440" bIns="45720" rtlCol="0" anchor="b"/>
+          <a:lstStyle>
+            <a:lvl1pPr algn="r">
+              <a:defRPr sz="1200"/>
+            </a:lvl1pPr>
+          </a:lstStyle>
+          <a:p>
+            <a:fld id="{28D5023D-FE11-054C-B5E3-AB75B1BC450A}" type="slidenum">
+              <a:rPr lang="en-US" smtClean="0"/>
+              <a:t>‹#›</a:t>
+            </a:fld>
+            <a:endParaRPr lang="en-US"/>
+          </a:p>
+        </p:txBody>
+      </p:sp>
+    </p:spTree>
+    <p:extLst>
+      <p:ext uri="{BB962C8B-B14F-4D97-AF65-F5344CB8AC3E}">
+        <p14:creationId xmlns:p14="http://schemas.microsoft.com/office/powerpoint/2010/main" val="1642793725"/>
+      </p:ext>
+    </p:extLst>
+  </p:cSld>
+  <p:clrMap bg1="lt1" tx1="dk1" bg2="lt2" tx2="dk2" accent1="accent1" accent2="accent2" accent3="accent3" accent4="accent4" accent5="accent5" accent6="accent6" hlink="hlink" folHlink="folHlink"/>
+  <p:notesStyle>
+    <a:lvl1pPr marL="0" algn="l" defTabSz="914400" rtl="0" eaLnBrk="1" latinLnBrk="0" hangingPunct="1">
+      <a:defRPr sz="1200" kern="1200">
+        <a:solidFill>
+          <a:schemeClr val="tx1"/>
+        </a:solidFill>
+        <a:latin typeface="+mn-lt"/>
+        <a:ea typeface="+mn-ea"/>
+        <a:cs typeface="+mn-cs"/>
+      </a:defRPr>
+    </a:lvl1pPr>
+    <a:lvl2pPr marL="457200" algn="l" defTabSz="914400" rtl="0" eaLnBrk="1" latinLnBrk="0" hangingPunct="1">
+      <a:defRPr sz="1200" kern="1200">
+        <a:solidFill>
+          <a:schemeClr val="tx1"/>
+        </a:solidFill>
+        <a:latin typeface="+mn-lt"/>
+        <a:ea typeface="+mn-ea"/>
+        <a:cs typeface="+mn-cs"/>
+      </a:defRPr>
+    </a:lvl2pPr>
+    <a:lvl3pPr marL="914400" algn="l" defTabSz="914400" rtl="0" eaLnBrk="1" latinLnBrk="0" hangingPunct="1">
+      <a:defRPr sz="1200" kern="1200">
+        <a:solidFill>
+          <a:schemeClr val="tx1"/>
+        </a:solidFill>
+        <a:latin typeface="+mn-lt"/>
+        <a:ea typeface="+mn-ea"/>
+        <a:cs typeface="+mn-cs"/>
+      </a:defRPr>
+    </a:lvl3pPr>
+    <a:lvl4pPr marL="1371600" algn="l" defTabSz="914400" rtl="0" eaLnBrk="1" latinLnBrk="0" hangingPunct="1">
+      <a:defRPr sz="1200" kern="1200">
+        <a:solidFill>
+          <a:schemeClr val="tx1"/>
+        </a:solidFill>
+        <a:latin typeface="+mn-lt"/>
+        <a:ea typeface="+mn-ea"/>
+        <a:cs typeface="+mn-cs"/>
+      </a:defRPr>
+    </a:lvl4pPr>
+    <a:lvl5pPr marL="1828800" algn="l" defTabSz="914400" rtl="0" eaLnBrk="1" latinLnBrk="0" hangingPunct="1">
+      <a:defRPr sz="1200" kern="1200">
+        <a:solidFill>
+          <a:schemeClr val="tx1"/>
+        </a:solidFill>
+        <a:latin typeface="+mn-lt"/>
+        <a:ea typeface="+mn-ea"/>
+        <a:cs typeface="+mn-cs"/>
+      </a:defRPr>
+    </a:lvl5pPr>
+    <a:lvl6pPr marL="2286000" algn="l" defTabSz="914400" rtl="0" eaLnBrk="1" latinLnBrk="0" hangingPunct="1">
+      <a:defRPr sz="1200" kern="1200">
+        <a:solidFill>
+          <a:schemeClr val="tx1"/>
+        </a:solidFill>
+        <a:latin typeface="+mn-lt"/>
+        <a:ea typeface="+mn-ea"/>
+        <a:cs typeface="+mn-cs"/>
+      </a:defRPr>
+    </a:lvl6pPr>
+    <a:lvl7pPr marL="2743200" algn="l" defTabSz="914400" rtl="0" eaLnBrk="1" latinLnBrk="0" hangingPunct="1">
+      <a:defRPr sz="1200" kern="1200">
+        <a:solidFill>
+          <a:schemeClr val="tx1"/>
+        </a:solidFill>
+        <a:latin typeface="+mn-lt"/>
+        <a:ea typeface="+mn-ea"/>
+        <a:cs typeface="+mn-cs"/>
+      </a:defRPr>
+    </a:lvl7pPr>
+    <a:lvl8pPr marL="3200400" algn="l" defTabSz="914400" rtl="0" eaLnBrk="1" latinLnBrk="0" hangingPunct="1">
+      <a:defRPr sz="1200" kern="1200">
+        <a:solidFill>
+          <a:schemeClr val="tx1"/>
+        </a:solidFill>
+        <a:latin typeface="+mn-lt"/>
+        <a:ea typeface="+mn-ea"/>
+        <a:cs typeface="+mn-cs"/>
+      </a:defRPr>
+    </a:lvl8pPr>
+    <a:lvl9pPr marL="3657600" algn="l" defTabSz="914400" rtl="0" eaLnBrk="1" latinLnBrk="0" hangingPunct="1">
+      <a:defRPr sz="1200" kern="1200">
+        <a:solidFill>
+          <a:schemeClr val="tx1"/>
+        </a:solidFill>
+        <a:latin typeface="+mn-lt"/>
+        <a:ea typeface="+mn-ea"/>
+        <a:cs typeface="+mn-cs"/>
+      </a:defRPr>
+    </a:lvl9pPr>
+  </p:notesStyle>
+</p:notesMaster>
+</file>
+
+<file path=ppt/notesSlides/notesSlide1.xml><?xml version="1.0" encoding="utf-8"?>
+<p:notes xmlns:a="http://schemas.openxmlformats.org/drawingml/2006/main" xmlns:r="http://schemas.openxmlformats.org/officeDocument/2006/relationships" xmlns:p="http://schemas.openxmlformats.org/presentationml/2006/main">
+  <p:cSld>
+    <p:spTree>
+      <p:nvGrpSpPr>
+        <p:cNvPr id="1" name=""/>
+        <p:cNvGrpSpPr/>
+        <p:nvPr/>
+      </p:nvGrpSpPr>
+      <p:grpSpPr>
+        <a:xfrm>
+          <a:off x="0" y="0"/>
+          <a:ext cx="0" cy="0"/>
+          <a:chOff x="0" y="0"/>
+          <a:chExt cx="0" cy="0"/>
+        </a:xfrm>
+      </p:grpSpPr>
+      <p:sp>
+        <p:nvSpPr>
+          <p:cNvPr id="2" name="Slide Image Placeholder 1"/>
+          <p:cNvSpPr>
+            <a:spLocks noGrp="1" noRot="1" noChangeAspect="1"/>
+          </p:cNvSpPr>
+          <p:nvPr>
+            <p:ph type="sldImg"/>
+          </p:nvPr>
+        </p:nvSpPr>
+        <p:spPr/>
+      </p:sp>
+      <p:sp>
+        <p:nvSpPr>
+          <p:cNvPr id="3" name="Notes Placeholder 2"/>
+          <p:cNvSpPr>
+            <a:spLocks noGrp="1"/>
+          </p:cNvSpPr>
+          <p:nvPr>
+            <p:ph type="body" idx="1"/>
+          </p:nvPr>
+        </p:nvSpPr>
+        <p:spPr/>
+        <p:txBody>
+          <a:bodyPr/>
+          <a:lstStyle/>
+          <a:p>
+            <a:endParaRPr lang="en-US"/>
+          </a:p>
+        </p:txBody>
+      </p:sp>
+      <p:sp>
+        <p:nvSpPr>
+          <p:cNvPr id="4" name="Slide Number Placeholder 3"/>
+          <p:cNvSpPr>
+            <a:spLocks noGrp="1"/>
+          </p:cNvSpPr>
+          <p:nvPr>
+            <p:ph type="sldNum" sz="quarter" idx="5"/>
+          </p:nvPr>
+        </p:nvSpPr>
+        <p:spPr/>
+        <p:txBody>
+          <a:bodyPr/>
+          <a:lstStyle/>
+          <a:p>
+            <a:fld id="{28D5023D-FE11-054C-B5E3-AB75B1BC450A}" type="slidenum">
+              <a:rPr lang="en-US" smtClean="0"/>
+              <a:t>1</a:t>
+            </a:fld>
+            <a:endParaRPr lang="en-US"/>
+          </a:p>
+        </p:txBody>
+      </p:sp>
+    </p:spTree>
+    <p:extLst>
+      <p:ext uri="{BB962C8B-B14F-4D97-AF65-F5344CB8AC3E}">
+        <p14:creationId xmlns:p14="http://schemas.microsoft.com/office/powerpoint/2010/main" val="3503082303"/>
+      </p:ext>
+    </p:extLst>
+  </p:cSld>
+  <p:clrMapOvr>
+    <a:masterClrMapping/>
+  </p:clrMapOvr>
+</p:notes>
+</file>
+
+<file path=ppt/notesSlides/notesSlide10.xml><?xml version="1.0" encoding="utf-8"?>
+<p:notes xmlns:a="http://schemas.openxmlformats.org/drawingml/2006/main" xmlns:r="http://schemas.openxmlformats.org/officeDocument/2006/relationships" xmlns:p="http://schemas.openxmlformats.org/presentationml/2006/main">
+  <p:cSld>
+    <p:spTree>
+      <p:nvGrpSpPr>
+        <p:cNvPr id="1" name=""/>
+        <p:cNvGrpSpPr/>
+        <p:nvPr/>
+      </p:nvGrpSpPr>
+      <p:grpSpPr>
+        <a:xfrm>
+          <a:off x="0" y="0"/>
+          <a:ext cx="0" cy="0"/>
+          <a:chOff x="0" y="0"/>
+          <a:chExt cx="0" cy="0"/>
+        </a:xfrm>
+      </p:grpSpPr>
+      <p:sp>
+        <p:nvSpPr>
+          <p:cNvPr id="2" name="Slide Image Placeholder 1"/>
+          <p:cNvSpPr>
+            <a:spLocks noGrp="1" noRot="1" noChangeAspect="1"/>
+          </p:cNvSpPr>
+          <p:nvPr>
+            <p:ph type="sldImg"/>
+          </p:nvPr>
+        </p:nvSpPr>
+        <p:spPr/>
+      </p:sp>
+      <p:sp>
+        <p:nvSpPr>
+          <p:cNvPr id="3" name="Notes Placeholder 2"/>
+          <p:cNvSpPr>
+            <a:spLocks noGrp="1"/>
+          </p:cNvSpPr>
+          <p:nvPr>
+            <p:ph type="body" idx="1"/>
+          </p:nvPr>
+        </p:nvSpPr>
+        <p:spPr/>
+        <p:txBody>
+          <a:bodyPr/>
+          <a:lstStyle/>
+          <a:p>
+            <a:endParaRPr lang="en-US"/>
+          </a:p>
+        </p:txBody>
+      </p:sp>
+      <p:sp>
+        <p:nvSpPr>
+          <p:cNvPr id="4" name="Slide Number Placeholder 3"/>
+          <p:cNvSpPr>
+            <a:spLocks noGrp="1"/>
+          </p:cNvSpPr>
+          <p:nvPr>
+            <p:ph type="sldNum" sz="quarter" idx="5"/>
+          </p:nvPr>
+        </p:nvSpPr>
+        <p:spPr/>
+        <p:txBody>
+          <a:bodyPr/>
+          <a:lstStyle/>
+          <a:p>
+            <a:fld id="{28D5023D-FE11-054C-B5E3-AB75B1BC450A}" type="slidenum">
+              <a:rPr lang="en-US" smtClean="0"/>
+              <a:t>10</a:t>
+            </a:fld>
+            <a:endParaRPr lang="en-US"/>
+          </a:p>
+        </p:txBody>
+      </p:sp>
+    </p:spTree>
+    <p:extLst>
+      <p:ext uri="{BB962C8B-B14F-4D97-AF65-F5344CB8AC3E}">
+        <p14:creationId xmlns:p14="http://schemas.microsoft.com/office/powerpoint/2010/main" val="4187263004"/>
+      </p:ext>
+    </p:extLst>
+  </p:cSld>
+  <p:clrMapOvr>
+    <a:masterClrMapping/>
+  </p:clrMapOvr>
+</p:notes>
+</file>
+
+<file path=ppt/notesSlides/notesSlide11.xml><?xml version="1.0" encoding="utf-8"?>
+<p:notes xmlns:a="http://schemas.openxmlformats.org/drawingml/2006/main" xmlns:r="http://schemas.openxmlformats.org/officeDocument/2006/relationships" xmlns:p="http://schemas.openxmlformats.org/presentationml/2006/main">
+  <p:cSld>
+    <p:spTree>
+      <p:nvGrpSpPr>
+        <p:cNvPr id="1" name=""/>
+        <p:cNvGrpSpPr/>
+        <p:nvPr/>
+      </p:nvGrpSpPr>
+      <p:grpSpPr>
+        <a:xfrm>
+          <a:off x="0" y="0"/>
+          <a:ext cx="0" cy="0"/>
+          <a:chOff x="0" y="0"/>
+          <a:chExt cx="0" cy="0"/>
+        </a:xfrm>
+      </p:grpSpPr>
+      <p:sp>
+        <p:nvSpPr>
+          <p:cNvPr id="2" name="Slide Image Placeholder 1"/>
+          <p:cNvSpPr>
+            <a:spLocks noGrp="1" noRot="1" noChangeAspect="1"/>
+          </p:cNvSpPr>
+          <p:nvPr>
+            <p:ph type="sldImg"/>
+          </p:nvPr>
+        </p:nvSpPr>
+        <p:spPr/>
+      </p:sp>
+      <p:sp>
+        <p:nvSpPr>
+          <p:cNvPr id="3" name="Notes Placeholder 2"/>
+          <p:cNvSpPr>
+            <a:spLocks noGrp="1"/>
+          </p:cNvSpPr>
+          <p:nvPr>
+            <p:ph type="body" idx="1"/>
+          </p:nvPr>
+        </p:nvSpPr>
+        <p:spPr/>
+        <p:txBody>
+          <a:bodyPr/>
+          <a:lstStyle/>
+          <a:p>
+            <a:endParaRPr lang="en-US"/>
+          </a:p>
+        </p:txBody>
+      </p:sp>
+      <p:sp>
+        <p:nvSpPr>
+          <p:cNvPr id="4" name="Slide Number Placeholder 3"/>
+          <p:cNvSpPr>
+            <a:spLocks noGrp="1"/>
+          </p:cNvSpPr>
+          <p:nvPr>
+            <p:ph type="sldNum" sz="quarter" idx="5"/>
+          </p:nvPr>
+        </p:nvSpPr>
+        <p:spPr/>
+        <p:txBody>
+          <a:bodyPr/>
+          <a:lstStyle/>
+          <a:p>
+            <a:fld id="{28D5023D-FE11-054C-B5E3-AB75B1BC450A}" type="slidenum">
+              <a:rPr lang="en-US" smtClean="0"/>
+              <a:t>11</a:t>
+            </a:fld>
+            <a:endParaRPr lang="en-US"/>
+          </a:p>
+        </p:txBody>
+      </p:sp>
+    </p:spTree>
+    <p:extLst>
+      <p:ext uri="{BB962C8B-B14F-4D97-AF65-F5344CB8AC3E}">
+        <p14:creationId xmlns:p14="http://schemas.microsoft.com/office/powerpoint/2010/main" val="924511462"/>
+      </p:ext>
+    </p:extLst>
+  </p:cSld>
+  <p:clrMapOvr>
+    <a:masterClrMapping/>
+  </p:clrMapOvr>
+</p:notes>
+</file>
+
+<file path=ppt/notesSlides/notesSlide12.xml><?xml version="1.0" encoding="utf-8"?>
+<p:notes xmlns:a="http://schemas.openxmlformats.org/drawingml/2006/main" xmlns:r="http://schemas.openxmlformats.org/officeDocument/2006/relationships" xmlns:p="http://schemas.openxmlformats.org/presentationml/2006/main">
+  <p:cSld>
+    <p:spTree>
+      <p:nvGrpSpPr>
+        <p:cNvPr id="1" name=""/>
+        <p:cNvGrpSpPr/>
+        <p:nvPr/>
+      </p:nvGrpSpPr>
+      <p:grpSpPr>
+        <a:xfrm>
+          <a:off x="0" y="0"/>
+          <a:ext cx="0" cy="0"/>
+          <a:chOff x="0" y="0"/>
+          <a:chExt cx="0" cy="0"/>
+        </a:xfrm>
+      </p:grpSpPr>
+      <p:sp>
+        <p:nvSpPr>
+          <p:cNvPr id="2" name="Slide Image Placeholder 1"/>
+          <p:cNvSpPr>
+            <a:spLocks noGrp="1" noRot="1" noChangeAspect="1"/>
+          </p:cNvSpPr>
+          <p:nvPr>
+            <p:ph type="sldImg"/>
+          </p:nvPr>
+        </p:nvSpPr>
+        <p:spPr/>
+      </p:sp>
+      <p:sp>
+        <p:nvSpPr>
+          <p:cNvPr id="3" name="Notes Placeholder 2"/>
+          <p:cNvSpPr>
+            <a:spLocks noGrp="1"/>
+          </p:cNvSpPr>
+          <p:nvPr>
+            <p:ph type="body" idx="1"/>
+          </p:nvPr>
+        </p:nvSpPr>
+        <p:spPr/>
+        <p:txBody>
+          <a:bodyPr/>
+          <a:lstStyle/>
+          <a:p>
+            <a:endParaRPr lang="en-US"/>
+          </a:p>
+        </p:txBody>
+      </p:sp>
+      <p:sp>
+        <p:nvSpPr>
+          <p:cNvPr id="4" name="Slide Number Placeholder 3"/>
+          <p:cNvSpPr>
+            <a:spLocks noGrp="1"/>
+          </p:cNvSpPr>
+          <p:nvPr>
+            <p:ph type="sldNum" sz="quarter" idx="5"/>
+          </p:nvPr>
+        </p:nvSpPr>
+        <p:spPr/>
+        <p:txBody>
+          <a:bodyPr/>
+          <a:lstStyle/>
+          <a:p>
+            <a:fld id="{28D5023D-FE11-054C-B5E3-AB75B1BC450A}" type="slidenum">
+              <a:rPr lang="en-US" smtClean="0"/>
+              <a:t>12</a:t>
+            </a:fld>
+            <a:endParaRPr lang="en-US"/>
+          </a:p>
+        </p:txBody>
+      </p:sp>
+    </p:spTree>
+    <p:extLst>
+      <p:ext uri="{BB962C8B-B14F-4D97-AF65-F5344CB8AC3E}">
+        <p14:creationId xmlns:p14="http://schemas.microsoft.com/office/powerpoint/2010/main" val="3109882610"/>
+      </p:ext>
+    </p:extLst>
+  </p:cSld>
+  <p:clrMapOvr>
+    <a:masterClrMapping/>
+  </p:clrMapOvr>
+</p:notes>
+</file>
+
+<file path=ppt/notesSlides/notesSlide13.xml><?xml version="1.0" encoding="utf-8"?>
+<p:notes xmlns:a="http://schemas.openxmlformats.org/drawingml/2006/main" xmlns:r="http://schemas.openxmlformats.org/officeDocument/2006/relationships" xmlns:p="http://schemas.openxmlformats.org/presentationml/2006/main">
+  <p:cSld>
+    <p:spTree>
+      <p:nvGrpSpPr>
+        <p:cNvPr id="1" name=""/>
+        <p:cNvGrpSpPr/>
+        <p:nvPr/>
+      </p:nvGrpSpPr>
+      <p:grpSpPr>
+        <a:xfrm>
+          <a:off x="0" y="0"/>
+          <a:ext cx="0" cy="0"/>
+          <a:chOff x="0" y="0"/>
+          <a:chExt cx="0" cy="0"/>
+        </a:xfrm>
+      </p:grpSpPr>
+      <p:sp>
+        <p:nvSpPr>
+          <p:cNvPr id="2" name="Slide Image Placeholder 1"/>
+          <p:cNvSpPr>
+            <a:spLocks noGrp="1" noRot="1" noChangeAspect="1"/>
+          </p:cNvSpPr>
+          <p:nvPr>
+            <p:ph type="sldImg"/>
+          </p:nvPr>
+        </p:nvSpPr>
+        <p:spPr/>
+      </p:sp>
+      <p:sp>
+        <p:nvSpPr>
+          <p:cNvPr id="3" name="Notes Placeholder 2"/>
+          <p:cNvSpPr>
+            <a:spLocks noGrp="1"/>
+          </p:cNvSpPr>
+          <p:nvPr>
+            <p:ph type="body" idx="1"/>
+          </p:nvPr>
+        </p:nvSpPr>
+        <p:spPr/>
+        <p:txBody>
+          <a:bodyPr/>
+          <a:lstStyle/>
+          <a:p>
+            <a:endParaRPr lang="en-US"/>
+          </a:p>
+        </p:txBody>
+      </p:sp>
+      <p:sp>
+        <p:nvSpPr>
+          <p:cNvPr id="4" name="Slide Number Placeholder 3"/>
+          <p:cNvSpPr>
+            <a:spLocks noGrp="1"/>
+          </p:cNvSpPr>
+          <p:nvPr>
+            <p:ph type="sldNum" sz="quarter" idx="5"/>
+          </p:nvPr>
+        </p:nvSpPr>
+        <p:spPr/>
+        <p:txBody>
+          <a:bodyPr/>
+          <a:lstStyle/>
+          <a:p>
+            <a:fld id="{28D5023D-FE11-054C-B5E3-AB75B1BC450A}" type="slidenum">
+              <a:rPr lang="en-US" smtClean="0"/>
+              <a:t>13</a:t>
+            </a:fld>
+            <a:endParaRPr lang="en-US"/>
+          </a:p>
+        </p:txBody>
+      </p:sp>
+    </p:spTree>
+    <p:extLst>
+      <p:ext uri="{BB962C8B-B14F-4D97-AF65-F5344CB8AC3E}">
+        <p14:creationId xmlns:p14="http://schemas.microsoft.com/office/powerpoint/2010/main" val="277895637"/>
+      </p:ext>
+    </p:extLst>
+  </p:cSld>
+  <p:clrMapOvr>
+    <a:masterClrMapping/>
+  </p:clrMapOvr>
+</p:notes>
+</file>
+
+<file path=ppt/notesSlides/notesSlide14.xml><?xml version="1.0" encoding="utf-8"?>
+<p:notes xmlns:a="http://schemas.openxmlformats.org/drawingml/2006/main" xmlns:r="http://schemas.openxmlformats.org/officeDocument/2006/relationships" xmlns:p="http://schemas.openxmlformats.org/presentationml/2006/main">
+  <p:cSld>
+    <p:spTree>
+      <p:nvGrpSpPr>
+        <p:cNvPr id="1" name=""/>
+        <p:cNvGrpSpPr/>
+        <p:nvPr/>
+      </p:nvGrpSpPr>
+      <p:grpSpPr>
+        <a:xfrm>
+          <a:off x="0" y="0"/>
+          <a:ext cx="0" cy="0"/>
+          <a:chOff x="0" y="0"/>
+          <a:chExt cx="0" cy="0"/>
+        </a:xfrm>
+      </p:grpSpPr>
+      <p:sp>
+        <p:nvSpPr>
+          <p:cNvPr id="2" name="Slide Image Placeholder 1"/>
+          <p:cNvSpPr>
+            <a:spLocks noGrp="1" noRot="1" noChangeAspect="1"/>
+          </p:cNvSpPr>
+          <p:nvPr>
+            <p:ph type="sldImg"/>
+          </p:nvPr>
+        </p:nvSpPr>
+        <p:spPr/>
+      </p:sp>
+      <p:sp>
+        <p:nvSpPr>
+          <p:cNvPr id="3" name="Notes Placeholder 2"/>
+          <p:cNvSpPr>
+            <a:spLocks noGrp="1"/>
+          </p:cNvSpPr>
+          <p:nvPr>
+            <p:ph type="body" idx="1"/>
+          </p:nvPr>
+        </p:nvSpPr>
+        <p:spPr/>
+        <p:txBody>
+          <a:bodyPr/>
+          <a:lstStyle/>
+          <a:p>
+            <a:endParaRPr lang="en-US"/>
+          </a:p>
+        </p:txBody>
+      </p:sp>
+      <p:sp>
+        <p:nvSpPr>
+          <p:cNvPr id="4" name="Slide Number Placeholder 3"/>
+          <p:cNvSpPr>
+            <a:spLocks noGrp="1"/>
+          </p:cNvSpPr>
+          <p:nvPr>
+            <p:ph type="sldNum" sz="quarter" idx="5"/>
+          </p:nvPr>
+        </p:nvSpPr>
+        <p:spPr/>
+        <p:txBody>
+          <a:bodyPr/>
+          <a:lstStyle/>
+          <a:p>
+            <a:fld id="{28D5023D-FE11-054C-B5E3-AB75B1BC450A}" type="slidenum">
+              <a:rPr lang="en-US" smtClean="0"/>
+              <a:t>14</a:t>
+            </a:fld>
+            <a:endParaRPr lang="en-US"/>
+          </a:p>
+        </p:txBody>
+      </p:sp>
+    </p:spTree>
+    <p:extLst>
+      <p:ext uri="{BB962C8B-B14F-4D97-AF65-F5344CB8AC3E}">
+        <p14:creationId xmlns:p14="http://schemas.microsoft.com/office/powerpoint/2010/main" val="2399870902"/>
+      </p:ext>
+    </p:extLst>
+  </p:cSld>
+  <p:clrMapOvr>
+    <a:masterClrMapping/>
+  </p:clrMapOvr>
+</p:notes>
+</file>
+
+<file path=ppt/notesSlides/notesSlide15.xml><?xml version="1.0" encoding="utf-8"?>
+<p:notes xmlns:a="http://schemas.openxmlformats.org/drawingml/2006/main" xmlns:r="http://schemas.openxmlformats.org/officeDocument/2006/relationships" xmlns:p="http://schemas.openxmlformats.org/presentationml/2006/main">
+  <p:cSld>
+    <p:spTree>
+      <p:nvGrpSpPr>
+        <p:cNvPr id="1" name=""/>
+        <p:cNvGrpSpPr/>
+        <p:nvPr/>
+      </p:nvGrpSpPr>
+      <p:grpSpPr>
+        <a:xfrm>
+          <a:off x="0" y="0"/>
+          <a:ext cx="0" cy="0"/>
+          <a:chOff x="0" y="0"/>
+          <a:chExt cx="0" cy="0"/>
+        </a:xfrm>
+      </p:grpSpPr>
+      <p:sp>
+        <p:nvSpPr>
+          <p:cNvPr id="2" name="Slide Image Placeholder 1"/>
+          <p:cNvSpPr>
+            <a:spLocks noGrp="1" noRot="1" noChangeAspect="1"/>
+          </p:cNvSpPr>
+          <p:nvPr>
+            <p:ph type="sldImg"/>
+          </p:nvPr>
+        </p:nvSpPr>
+        <p:spPr/>
+      </p:sp>
+      <p:sp>
+        <p:nvSpPr>
+          <p:cNvPr id="3" name="Notes Placeholder 2"/>
+          <p:cNvSpPr>
+            <a:spLocks noGrp="1"/>
+          </p:cNvSpPr>
+          <p:nvPr>
+            <p:ph type="body" idx="1"/>
+          </p:nvPr>
+        </p:nvSpPr>
+        <p:spPr/>
+        <p:txBody>
+          <a:bodyPr/>
+          <a:lstStyle/>
+          <a:p>
+            <a:endParaRPr lang="en-US"/>
+          </a:p>
+        </p:txBody>
+      </p:sp>
+      <p:sp>
+        <p:nvSpPr>
+          <p:cNvPr id="4" name="Slide Number Placeholder 3"/>
+          <p:cNvSpPr>
+            <a:spLocks noGrp="1"/>
+          </p:cNvSpPr>
+          <p:nvPr>
+            <p:ph type="sldNum" sz="quarter" idx="5"/>
+          </p:nvPr>
+        </p:nvSpPr>
+        <p:spPr/>
+        <p:txBody>
+          <a:bodyPr/>
+          <a:lstStyle/>
+          <a:p>
+            <a:fld id="{28D5023D-FE11-054C-B5E3-AB75B1BC450A}" type="slidenum">
+              <a:rPr lang="en-US" smtClean="0"/>
+              <a:t>15</a:t>
+            </a:fld>
+            <a:endParaRPr lang="en-US"/>
+          </a:p>
+        </p:txBody>
+      </p:sp>
+    </p:spTree>
+    <p:extLst>
+      <p:ext uri="{BB962C8B-B14F-4D97-AF65-F5344CB8AC3E}">
+        <p14:creationId xmlns:p14="http://schemas.microsoft.com/office/powerpoint/2010/main" val="1532340848"/>
+      </p:ext>
+    </p:extLst>
+  </p:cSld>
+  <p:clrMapOvr>
+    <a:masterClrMapping/>
+  </p:clrMapOvr>
+</p:notes>
+</file>
+
+<file path=ppt/notesSlides/notesSlide16.xml><?xml version="1.0" encoding="utf-8"?>
+<p:notes xmlns:a="http://schemas.openxmlformats.org/drawingml/2006/main" xmlns:r="http://schemas.openxmlformats.org/officeDocument/2006/relationships" xmlns:p="http://schemas.openxmlformats.org/presentationml/2006/main">
+  <p:cSld>
+    <p:spTree>
+      <p:nvGrpSpPr>
+        <p:cNvPr id="1" name=""/>
+        <p:cNvGrpSpPr/>
+        <p:nvPr/>
+      </p:nvGrpSpPr>
+      <p:grpSpPr>
+        <a:xfrm>
+          <a:off x="0" y="0"/>
+          <a:ext cx="0" cy="0"/>
+          <a:chOff x="0" y="0"/>
+          <a:chExt cx="0" cy="0"/>
+        </a:xfrm>
+      </p:grpSpPr>
+      <p:sp>
+        <p:nvSpPr>
+          <p:cNvPr id="2" name="Slide Image Placeholder 1"/>
+          <p:cNvSpPr>
+            <a:spLocks noGrp="1" noRot="1" noChangeAspect="1"/>
+          </p:cNvSpPr>
+          <p:nvPr>
+            <p:ph type="sldImg"/>
+          </p:nvPr>
+        </p:nvSpPr>
+        <p:spPr/>
+      </p:sp>
+      <p:sp>
+        <p:nvSpPr>
+          <p:cNvPr id="3" name="Notes Placeholder 2"/>
+          <p:cNvSpPr>
+            <a:spLocks noGrp="1"/>
+          </p:cNvSpPr>
+          <p:nvPr>
+            <p:ph type="body" idx="1"/>
+          </p:nvPr>
+        </p:nvSpPr>
+        <p:spPr/>
+        <p:txBody>
+          <a:bodyPr/>
+          <a:lstStyle/>
+          <a:p>
+            <a:endParaRPr lang="en-US"/>
+          </a:p>
+        </p:txBody>
+      </p:sp>
+      <p:sp>
+        <p:nvSpPr>
+          <p:cNvPr id="4" name="Slide Number Placeholder 3"/>
+          <p:cNvSpPr>
+            <a:spLocks noGrp="1"/>
+          </p:cNvSpPr>
+          <p:nvPr>
+            <p:ph type="sldNum" sz="quarter" idx="5"/>
+          </p:nvPr>
+        </p:nvSpPr>
+        <p:spPr/>
+        <p:txBody>
+          <a:bodyPr/>
+          <a:lstStyle/>
+          <a:p>
+            <a:fld id="{28D5023D-FE11-054C-B5E3-AB75B1BC450A}" type="slidenum">
+              <a:rPr lang="en-US" smtClean="0"/>
+              <a:t>16</a:t>
+            </a:fld>
+            <a:endParaRPr lang="en-US"/>
+          </a:p>
+        </p:txBody>
+      </p:sp>
+    </p:spTree>
+    <p:extLst>
+      <p:ext uri="{BB962C8B-B14F-4D97-AF65-F5344CB8AC3E}">
+        <p14:creationId xmlns:p14="http://schemas.microsoft.com/office/powerpoint/2010/main" val="1762148581"/>
+      </p:ext>
+    </p:extLst>
+  </p:cSld>
+  <p:clrMapOvr>
+    <a:masterClrMapping/>
+  </p:clrMapOvr>
+</p:notes>
+</file>
+
+<file path=ppt/notesSlides/notesSlide17.xml><?xml version="1.0" encoding="utf-8"?>
+<p:notes xmlns:a="http://schemas.openxmlformats.org/drawingml/2006/main" xmlns:r="http://schemas.openxmlformats.org/officeDocument/2006/relationships" xmlns:p="http://schemas.openxmlformats.org/presentationml/2006/main">
+  <p:cSld>
+    <p:spTree>
+      <p:nvGrpSpPr>
+        <p:cNvPr id="1" name=""/>
+        <p:cNvGrpSpPr/>
+        <p:nvPr/>
+      </p:nvGrpSpPr>
+      <p:grpSpPr>
+        <a:xfrm>
+          <a:off x="0" y="0"/>
+          <a:ext cx="0" cy="0"/>
+          <a:chOff x="0" y="0"/>
+          <a:chExt cx="0" cy="0"/>
+        </a:xfrm>
+      </p:grpSpPr>
+      <p:sp>
+        <p:nvSpPr>
+          <p:cNvPr id="2" name="Slide Image Placeholder 1"/>
+          <p:cNvSpPr>
+            <a:spLocks noGrp="1" noRot="1" noChangeAspect="1"/>
+          </p:cNvSpPr>
+          <p:nvPr>
+            <p:ph type="sldImg"/>
+          </p:nvPr>
+        </p:nvSpPr>
+        <p:spPr/>
+      </p:sp>
+      <p:sp>
+        <p:nvSpPr>
+          <p:cNvPr id="3" name="Notes Placeholder 2"/>
+          <p:cNvSpPr>
+            <a:spLocks noGrp="1"/>
+          </p:cNvSpPr>
+          <p:nvPr>
+            <p:ph type="body" idx="1"/>
+          </p:nvPr>
+        </p:nvSpPr>
+        <p:spPr/>
+        <p:txBody>
+          <a:bodyPr/>
+          <a:lstStyle/>
+          <a:p>
+            <a:endParaRPr lang="en-US"/>
+          </a:p>
+        </p:txBody>
+      </p:sp>
+      <p:sp>
+        <p:nvSpPr>
+          <p:cNvPr id="4" name="Slide Number Placeholder 3"/>
+          <p:cNvSpPr>
+            <a:spLocks noGrp="1"/>
+          </p:cNvSpPr>
+          <p:nvPr>
+            <p:ph type="sldNum" sz="quarter" idx="5"/>
+          </p:nvPr>
+        </p:nvSpPr>
+        <p:spPr/>
+        <p:txBody>
+          <a:bodyPr/>
+          <a:lstStyle/>
+          <a:p>
+            <a:fld id="{28D5023D-FE11-054C-B5E3-AB75B1BC450A}" type="slidenum">
+              <a:rPr lang="en-US" smtClean="0"/>
+              <a:t>17</a:t>
+            </a:fld>
+            <a:endParaRPr lang="en-US"/>
+          </a:p>
+        </p:txBody>
+      </p:sp>
+    </p:spTree>
+    <p:extLst>
+      <p:ext uri="{BB962C8B-B14F-4D97-AF65-F5344CB8AC3E}">
+        <p14:creationId xmlns:p14="http://schemas.microsoft.com/office/powerpoint/2010/main" val="1489907225"/>
+      </p:ext>
+    </p:extLst>
+  </p:cSld>
+  <p:clrMapOvr>
+    <a:masterClrMapping/>
+  </p:clrMapOvr>
+</p:notes>
+</file>
+
+<file path=ppt/notesSlides/notesSlide18.xml><?xml version="1.0" encoding="utf-8"?>
+<p:notes xmlns:a="http://schemas.openxmlformats.org/drawingml/2006/main" xmlns:r="http://schemas.openxmlformats.org/officeDocument/2006/relationships" xmlns:p="http://schemas.openxmlformats.org/presentationml/2006/main">
+  <p:cSld>
+    <p:spTree>
+      <p:nvGrpSpPr>
+        <p:cNvPr id="1" name=""/>
+        <p:cNvGrpSpPr/>
+        <p:nvPr/>
+      </p:nvGrpSpPr>
+      <p:grpSpPr>
+        <a:xfrm>
+          <a:off x="0" y="0"/>
+          <a:ext cx="0" cy="0"/>
+          <a:chOff x="0" y="0"/>
+          <a:chExt cx="0" cy="0"/>
+        </a:xfrm>
+      </p:grpSpPr>
+      <p:sp>
+        <p:nvSpPr>
+          <p:cNvPr id="2" name="Slide Image Placeholder 1"/>
+          <p:cNvSpPr>
+            <a:spLocks noGrp="1" noRot="1" noChangeAspect="1"/>
+          </p:cNvSpPr>
+          <p:nvPr>
+            <p:ph type="sldImg"/>
+          </p:nvPr>
+        </p:nvSpPr>
+        <p:spPr/>
+      </p:sp>
+      <p:sp>
+        <p:nvSpPr>
+          <p:cNvPr id="3" name="Notes Placeholder 2"/>
+          <p:cNvSpPr>
+            <a:spLocks noGrp="1"/>
+          </p:cNvSpPr>
+          <p:nvPr>
+            <p:ph type="body" idx="1"/>
+          </p:nvPr>
+        </p:nvSpPr>
+        <p:spPr/>
+        <p:txBody>
+          <a:bodyPr/>
+          <a:lstStyle/>
+          <a:p>
+            <a:endParaRPr lang="en-US"/>
+          </a:p>
+        </p:txBody>
+      </p:sp>
+      <p:sp>
+        <p:nvSpPr>
+          <p:cNvPr id="4" name="Slide Number Placeholder 3"/>
+          <p:cNvSpPr>
+            <a:spLocks noGrp="1"/>
+          </p:cNvSpPr>
+          <p:nvPr>
+            <p:ph type="sldNum" sz="quarter" idx="5"/>
+          </p:nvPr>
+        </p:nvSpPr>
+        <p:spPr/>
+        <p:txBody>
+          <a:bodyPr/>
+          <a:lstStyle/>
+          <a:p>
+            <a:fld id="{28D5023D-FE11-054C-B5E3-AB75B1BC450A}" type="slidenum">
+              <a:rPr lang="en-US" smtClean="0"/>
+              <a:t>18</a:t>
+            </a:fld>
+            <a:endParaRPr lang="en-US"/>
+          </a:p>
+        </p:txBody>
+      </p:sp>
+    </p:spTree>
+    <p:extLst>
+      <p:ext uri="{BB962C8B-B14F-4D97-AF65-F5344CB8AC3E}">
+        <p14:creationId xmlns:p14="http://schemas.microsoft.com/office/powerpoint/2010/main" val="3151743284"/>
+      </p:ext>
+    </p:extLst>
+  </p:cSld>
+  <p:clrMapOvr>
+    <a:masterClrMapping/>
+  </p:clrMapOvr>
+</p:notes>
+</file>
+
+<file path=ppt/notesSlides/notesSlide19.xml><?xml version="1.0" encoding="utf-8"?>
+<p:notes xmlns:a="http://schemas.openxmlformats.org/drawingml/2006/main" xmlns:r="http://schemas.openxmlformats.org/officeDocument/2006/relationships" xmlns:p="http://schemas.openxmlformats.org/presentationml/2006/main">
+  <p:cSld>
+    <p:spTree>
+      <p:nvGrpSpPr>
+        <p:cNvPr id="1" name=""/>
+        <p:cNvGrpSpPr/>
+        <p:nvPr/>
+      </p:nvGrpSpPr>
+      <p:grpSpPr>
+        <a:xfrm>
+          <a:off x="0" y="0"/>
+          <a:ext cx="0" cy="0"/>
+          <a:chOff x="0" y="0"/>
+          <a:chExt cx="0" cy="0"/>
+        </a:xfrm>
+      </p:grpSpPr>
+      <p:sp>
+        <p:nvSpPr>
+          <p:cNvPr id="2" name="Slide Image Placeholder 1"/>
+          <p:cNvSpPr>
+            <a:spLocks noGrp="1" noRot="1" noChangeAspect="1"/>
+          </p:cNvSpPr>
+          <p:nvPr>
+            <p:ph type="sldImg"/>
+          </p:nvPr>
+        </p:nvSpPr>
+        <p:spPr/>
+      </p:sp>
+      <p:sp>
+        <p:nvSpPr>
+          <p:cNvPr id="3" name="Notes Placeholder 2"/>
+          <p:cNvSpPr>
+            <a:spLocks noGrp="1"/>
+          </p:cNvSpPr>
+          <p:nvPr>
+            <p:ph type="body" idx="1"/>
+          </p:nvPr>
+        </p:nvSpPr>
+        <p:spPr/>
+        <p:txBody>
+          <a:bodyPr/>
+          <a:lstStyle/>
+          <a:p>
+            <a:endParaRPr lang="en-US"/>
+          </a:p>
+        </p:txBody>
+      </p:sp>
+      <p:sp>
+        <p:nvSpPr>
+          <p:cNvPr id="4" name="Slide Number Placeholder 3"/>
+          <p:cNvSpPr>
+            <a:spLocks noGrp="1"/>
+          </p:cNvSpPr>
+          <p:nvPr>
+            <p:ph type="sldNum" sz="quarter" idx="5"/>
+          </p:nvPr>
+        </p:nvSpPr>
+        <p:spPr/>
+        <p:txBody>
+          <a:bodyPr/>
+          <a:lstStyle/>
+          <a:p>
+            <a:fld id="{28D5023D-FE11-054C-B5E3-AB75B1BC450A}" type="slidenum">
+              <a:rPr lang="en-US" smtClean="0"/>
+              <a:t>19</a:t>
+            </a:fld>
+            <a:endParaRPr lang="en-US"/>
+          </a:p>
+        </p:txBody>
+      </p:sp>
+    </p:spTree>
+    <p:extLst>
+      <p:ext uri="{BB962C8B-B14F-4D97-AF65-F5344CB8AC3E}">
+        <p14:creationId xmlns:p14="http://schemas.microsoft.com/office/powerpoint/2010/main" val="1971144849"/>
+      </p:ext>
+    </p:extLst>
+  </p:cSld>
+  <p:clrMapOvr>
+    <a:masterClrMapping/>
+  </p:clrMapOvr>
+</p:notes>
+</file>
+
+<file path=ppt/notesSlides/notesSlide2.xml><?xml version="1.0" encoding="utf-8"?>
+<p:notes xmlns:a="http://schemas.openxmlformats.org/drawingml/2006/main" xmlns:r="http://schemas.openxmlformats.org/officeDocument/2006/relationships" xmlns:p="http://schemas.openxmlformats.org/presentationml/2006/main">
+  <p:cSld>
+    <p:spTree>
+      <p:nvGrpSpPr>
+        <p:cNvPr id="1" name=""/>
+        <p:cNvGrpSpPr/>
+        <p:nvPr/>
+      </p:nvGrpSpPr>
+      <p:grpSpPr>
+        <a:xfrm>
+          <a:off x="0" y="0"/>
+          <a:ext cx="0" cy="0"/>
+          <a:chOff x="0" y="0"/>
+          <a:chExt cx="0" cy="0"/>
+        </a:xfrm>
+      </p:grpSpPr>
+      <p:sp>
+        <p:nvSpPr>
+          <p:cNvPr id="2" name="Slide Image Placeholder 1"/>
+          <p:cNvSpPr>
+            <a:spLocks noGrp="1" noRot="1" noChangeAspect="1"/>
+          </p:cNvSpPr>
+          <p:nvPr>
+            <p:ph type="sldImg"/>
+          </p:nvPr>
+        </p:nvSpPr>
+        <p:spPr/>
+      </p:sp>
+      <p:sp>
+        <p:nvSpPr>
+          <p:cNvPr id="3" name="Notes Placeholder 2"/>
+          <p:cNvSpPr>
+            <a:spLocks noGrp="1"/>
+          </p:cNvSpPr>
+          <p:nvPr>
+            <p:ph type="body" idx="1"/>
+          </p:nvPr>
+        </p:nvSpPr>
+        <p:spPr/>
+        <p:txBody>
+          <a:bodyPr/>
+          <a:lstStyle/>
+          <a:p>
+            <a:endParaRPr lang="en-US"/>
+          </a:p>
+        </p:txBody>
+      </p:sp>
+      <p:sp>
+        <p:nvSpPr>
+          <p:cNvPr id="4" name="Slide Number Placeholder 3"/>
+          <p:cNvSpPr>
+            <a:spLocks noGrp="1"/>
+          </p:cNvSpPr>
+          <p:nvPr>
+            <p:ph type="sldNum" sz="quarter" idx="5"/>
+          </p:nvPr>
+        </p:nvSpPr>
+        <p:spPr/>
+        <p:txBody>
+          <a:bodyPr/>
+          <a:lstStyle/>
+          <a:p>
+            <a:fld id="{28D5023D-FE11-054C-B5E3-AB75B1BC450A}" type="slidenum">
+              <a:rPr lang="en-US" smtClean="0"/>
+              <a:t>2</a:t>
+            </a:fld>
+            <a:endParaRPr lang="en-US"/>
+          </a:p>
+        </p:txBody>
+      </p:sp>
+    </p:spTree>
+    <p:extLst>
+      <p:ext uri="{BB962C8B-B14F-4D97-AF65-F5344CB8AC3E}">
+        <p14:creationId xmlns:p14="http://schemas.microsoft.com/office/powerpoint/2010/main" val="894604745"/>
+      </p:ext>
+    </p:extLst>
+  </p:cSld>
+  <p:clrMapOvr>
+    <a:masterClrMapping/>
+  </p:clrMapOvr>
+</p:notes>
+</file>
+
+<file path=ppt/notesSlides/notesSlide20.xml><?xml version="1.0" encoding="utf-8"?>
+<p:notes xmlns:a="http://schemas.openxmlformats.org/drawingml/2006/main" xmlns:r="http://schemas.openxmlformats.org/officeDocument/2006/relationships" xmlns:p="http://schemas.openxmlformats.org/presentationml/2006/main">
+  <p:cSld>
+    <p:spTree>
+      <p:nvGrpSpPr>
+        <p:cNvPr id="1" name=""/>
+        <p:cNvGrpSpPr/>
+        <p:nvPr/>
+      </p:nvGrpSpPr>
+      <p:grpSpPr>
+        <a:xfrm>
+          <a:off x="0" y="0"/>
+          <a:ext cx="0" cy="0"/>
+          <a:chOff x="0" y="0"/>
+          <a:chExt cx="0" cy="0"/>
+        </a:xfrm>
+      </p:grpSpPr>
+      <p:sp>
+        <p:nvSpPr>
+          <p:cNvPr id="2" name="Slide Image Placeholder 1"/>
+          <p:cNvSpPr>
+            <a:spLocks noGrp="1" noRot="1" noChangeAspect="1"/>
+          </p:cNvSpPr>
+          <p:nvPr>
+            <p:ph type="sldImg"/>
+          </p:nvPr>
+        </p:nvSpPr>
+        <p:spPr/>
+      </p:sp>
+      <p:sp>
+        <p:nvSpPr>
+          <p:cNvPr id="3" name="Notes Placeholder 2"/>
+          <p:cNvSpPr>
+            <a:spLocks noGrp="1"/>
+          </p:cNvSpPr>
+          <p:nvPr>
+            <p:ph type="body" idx="1"/>
+          </p:nvPr>
+        </p:nvSpPr>
+        <p:spPr/>
+        <p:txBody>
+          <a:bodyPr/>
+          <a:lstStyle/>
+          <a:p>
+            <a:endParaRPr lang="en-US"/>
+          </a:p>
+        </p:txBody>
+      </p:sp>
+      <p:sp>
+        <p:nvSpPr>
+          <p:cNvPr id="4" name="Slide Number Placeholder 3"/>
+          <p:cNvSpPr>
+            <a:spLocks noGrp="1"/>
+          </p:cNvSpPr>
+          <p:nvPr>
+            <p:ph type="sldNum" sz="quarter" idx="5"/>
+          </p:nvPr>
+        </p:nvSpPr>
+        <p:spPr/>
+        <p:txBody>
+          <a:bodyPr/>
+          <a:lstStyle/>
+          <a:p>
+            <a:fld id="{28D5023D-FE11-054C-B5E3-AB75B1BC450A}" type="slidenum">
+              <a:rPr lang="en-US" smtClean="0"/>
+              <a:t>20</a:t>
+            </a:fld>
+            <a:endParaRPr lang="en-US"/>
+          </a:p>
+        </p:txBody>
+      </p:sp>
+    </p:spTree>
+    <p:extLst>
+      <p:ext uri="{BB962C8B-B14F-4D97-AF65-F5344CB8AC3E}">
+        <p14:creationId xmlns:p14="http://schemas.microsoft.com/office/powerpoint/2010/main" val="2261797957"/>
+      </p:ext>
+    </p:extLst>
+  </p:cSld>
+  <p:clrMapOvr>
+    <a:masterClrMapping/>
+  </p:clrMapOvr>
+</p:notes>
+</file>
+
+<file path=ppt/notesSlides/notesSlide21.xml><?xml version="1.0" encoding="utf-8"?>
+<p:notes xmlns:a="http://schemas.openxmlformats.org/drawingml/2006/main" xmlns:r="http://schemas.openxmlformats.org/officeDocument/2006/relationships" xmlns:p="http://schemas.openxmlformats.org/presentationml/2006/main">
+  <p:cSld>
+    <p:spTree>
+      <p:nvGrpSpPr>
+        <p:cNvPr id="1" name=""/>
+        <p:cNvGrpSpPr/>
+        <p:nvPr/>
+      </p:nvGrpSpPr>
+      <p:grpSpPr>
+        <a:xfrm>
+          <a:off x="0" y="0"/>
+          <a:ext cx="0" cy="0"/>
+          <a:chOff x="0" y="0"/>
+          <a:chExt cx="0" cy="0"/>
+        </a:xfrm>
+      </p:grpSpPr>
+      <p:sp>
+        <p:nvSpPr>
+          <p:cNvPr id="2" name="Slide Image Placeholder 1"/>
+          <p:cNvSpPr>
+            <a:spLocks noGrp="1" noRot="1" noChangeAspect="1"/>
+          </p:cNvSpPr>
+          <p:nvPr>
+            <p:ph type="sldImg"/>
+          </p:nvPr>
+        </p:nvSpPr>
+        <p:spPr/>
+      </p:sp>
+      <p:sp>
+        <p:nvSpPr>
+          <p:cNvPr id="3" name="Notes Placeholder 2"/>
+          <p:cNvSpPr>
+            <a:spLocks noGrp="1"/>
+          </p:cNvSpPr>
+          <p:nvPr>
+            <p:ph type="body" idx="1"/>
+          </p:nvPr>
+        </p:nvSpPr>
+        <p:spPr/>
+        <p:txBody>
+          <a:bodyPr/>
+          <a:lstStyle/>
+          <a:p>
+            <a:endParaRPr lang="en-US"/>
+          </a:p>
+        </p:txBody>
+      </p:sp>
+      <p:sp>
+        <p:nvSpPr>
+          <p:cNvPr id="4" name="Slide Number Placeholder 3"/>
+          <p:cNvSpPr>
+            <a:spLocks noGrp="1"/>
+          </p:cNvSpPr>
+          <p:nvPr>
+            <p:ph type="sldNum" sz="quarter" idx="5"/>
+          </p:nvPr>
+        </p:nvSpPr>
+        <p:spPr/>
+        <p:txBody>
+          <a:bodyPr/>
+          <a:lstStyle/>
+          <a:p>
+            <a:fld id="{28D5023D-FE11-054C-B5E3-AB75B1BC450A}" type="slidenum">
+              <a:rPr lang="en-US" smtClean="0"/>
+              <a:t>21</a:t>
+            </a:fld>
+            <a:endParaRPr lang="en-US"/>
+          </a:p>
+        </p:txBody>
+      </p:sp>
+    </p:spTree>
+    <p:extLst>
+      <p:ext uri="{BB962C8B-B14F-4D97-AF65-F5344CB8AC3E}">
+        <p14:creationId xmlns:p14="http://schemas.microsoft.com/office/powerpoint/2010/main" val="3538053946"/>
+      </p:ext>
+    </p:extLst>
+  </p:cSld>
+  <p:clrMapOvr>
+    <a:masterClrMapping/>
+  </p:clrMapOvr>
+</p:notes>
+</file>
+
+<file path=ppt/notesSlides/notesSlide22.xml><?xml version="1.0" encoding="utf-8"?>
+<p:notes xmlns:a="http://schemas.openxmlformats.org/drawingml/2006/main" xmlns:r="http://schemas.openxmlformats.org/officeDocument/2006/relationships" xmlns:p="http://schemas.openxmlformats.org/presentationml/2006/main">
+  <p:cSld>
+    <p:spTree>
+      <p:nvGrpSpPr>
+        <p:cNvPr id="1" name=""/>
+        <p:cNvGrpSpPr/>
+        <p:nvPr/>
+      </p:nvGrpSpPr>
+      <p:grpSpPr>
+        <a:xfrm>
+          <a:off x="0" y="0"/>
+          <a:ext cx="0" cy="0"/>
+          <a:chOff x="0" y="0"/>
+          <a:chExt cx="0" cy="0"/>
+        </a:xfrm>
+      </p:grpSpPr>
+      <p:sp>
+        <p:nvSpPr>
+          <p:cNvPr id="2" name="Slide Image Placeholder 1"/>
+          <p:cNvSpPr>
+            <a:spLocks noGrp="1" noRot="1" noChangeAspect="1"/>
+          </p:cNvSpPr>
+          <p:nvPr>
+            <p:ph type="sldImg"/>
+          </p:nvPr>
+        </p:nvSpPr>
+        <p:spPr/>
+      </p:sp>
+      <p:sp>
+        <p:nvSpPr>
+          <p:cNvPr id="3" name="Notes Placeholder 2"/>
+          <p:cNvSpPr>
+            <a:spLocks noGrp="1"/>
+          </p:cNvSpPr>
+          <p:nvPr>
+            <p:ph type="body" idx="1"/>
+          </p:nvPr>
+        </p:nvSpPr>
+        <p:spPr/>
+        <p:txBody>
+          <a:bodyPr/>
+          <a:lstStyle/>
+          <a:p>
+            <a:endParaRPr lang="en-US"/>
+          </a:p>
+        </p:txBody>
+      </p:sp>
+      <p:sp>
+        <p:nvSpPr>
+          <p:cNvPr id="4" name="Slide Number Placeholder 3"/>
+          <p:cNvSpPr>
+            <a:spLocks noGrp="1"/>
+          </p:cNvSpPr>
+          <p:nvPr>
+            <p:ph type="sldNum" sz="quarter" idx="5"/>
+          </p:nvPr>
+        </p:nvSpPr>
+        <p:spPr/>
+        <p:txBody>
+          <a:bodyPr/>
+          <a:lstStyle/>
+          <a:p>
+            <a:fld id="{28D5023D-FE11-054C-B5E3-AB75B1BC450A}" type="slidenum">
+              <a:rPr lang="en-US" smtClean="0"/>
+              <a:t>22</a:t>
+            </a:fld>
+            <a:endParaRPr lang="en-US"/>
+          </a:p>
+        </p:txBody>
+      </p:sp>
+    </p:spTree>
+    <p:extLst>
+      <p:ext uri="{BB962C8B-B14F-4D97-AF65-F5344CB8AC3E}">
+        <p14:creationId xmlns:p14="http://schemas.microsoft.com/office/powerpoint/2010/main" val="2399834909"/>
+      </p:ext>
+    </p:extLst>
+  </p:cSld>
+  <p:clrMapOvr>
+    <a:masterClrMapping/>
+  </p:clrMapOvr>
+</p:notes>
+</file>
+
+<file path=ppt/notesSlides/notesSlide23.xml><?xml version="1.0" encoding="utf-8"?>
+<p:notes xmlns:a="http://schemas.openxmlformats.org/drawingml/2006/main" xmlns:r="http://schemas.openxmlformats.org/officeDocument/2006/relationships" xmlns:p="http://schemas.openxmlformats.org/presentationml/2006/main">
+  <p:cSld>
+    <p:spTree>
+      <p:nvGrpSpPr>
+        <p:cNvPr id="1" name=""/>
+        <p:cNvGrpSpPr/>
+        <p:nvPr/>
+      </p:nvGrpSpPr>
+      <p:grpSpPr>
+        <a:xfrm>
+          <a:off x="0" y="0"/>
+          <a:ext cx="0" cy="0"/>
+          <a:chOff x="0" y="0"/>
+          <a:chExt cx="0" cy="0"/>
+        </a:xfrm>
+      </p:grpSpPr>
+      <p:sp>
+        <p:nvSpPr>
+          <p:cNvPr id="2" name="Slide Image Placeholder 1"/>
+          <p:cNvSpPr>
+            <a:spLocks noGrp="1" noRot="1" noChangeAspect="1"/>
+          </p:cNvSpPr>
+          <p:nvPr>
+            <p:ph type="sldImg"/>
+          </p:nvPr>
+        </p:nvSpPr>
+        <p:spPr/>
+      </p:sp>
+      <p:sp>
+        <p:nvSpPr>
+          <p:cNvPr id="3" name="Notes Placeholder 2"/>
+          <p:cNvSpPr>
+            <a:spLocks noGrp="1"/>
+          </p:cNvSpPr>
+          <p:nvPr>
+            <p:ph type="body" idx="1"/>
+          </p:nvPr>
+        </p:nvSpPr>
+        <p:spPr/>
+        <p:txBody>
+          <a:bodyPr/>
+          <a:lstStyle/>
+          <a:p>
+            <a:endParaRPr lang="en-US"/>
+          </a:p>
+        </p:txBody>
+      </p:sp>
+      <p:sp>
+        <p:nvSpPr>
+          <p:cNvPr id="4" name="Slide Number Placeholder 3"/>
+          <p:cNvSpPr>
+            <a:spLocks noGrp="1"/>
+          </p:cNvSpPr>
+          <p:nvPr>
+            <p:ph type="sldNum" sz="quarter" idx="5"/>
+          </p:nvPr>
+        </p:nvSpPr>
+        <p:spPr/>
+        <p:txBody>
+          <a:bodyPr/>
+          <a:lstStyle/>
+          <a:p>
+            <a:fld id="{28D5023D-FE11-054C-B5E3-AB75B1BC450A}" type="slidenum">
+              <a:rPr lang="en-US" smtClean="0"/>
+              <a:t>23</a:t>
+            </a:fld>
+            <a:endParaRPr lang="en-US"/>
+          </a:p>
+        </p:txBody>
+      </p:sp>
+    </p:spTree>
+    <p:extLst>
+      <p:ext uri="{BB962C8B-B14F-4D97-AF65-F5344CB8AC3E}">
+        <p14:creationId xmlns:p14="http://schemas.microsoft.com/office/powerpoint/2010/main" val="2579020091"/>
+      </p:ext>
+    </p:extLst>
+  </p:cSld>
+  <p:clrMapOvr>
+    <a:masterClrMapping/>
+  </p:clrMapOvr>
+</p:notes>
+</file>
+
+<file path=ppt/notesSlides/notesSlide24.xml><?xml version="1.0" encoding="utf-8"?>
+<p:notes xmlns:a="http://schemas.openxmlformats.org/drawingml/2006/main" xmlns:r="http://schemas.openxmlformats.org/officeDocument/2006/relationships" xmlns:p="http://schemas.openxmlformats.org/presentationml/2006/main">
+  <p:cSld>
+    <p:spTree>
+      <p:nvGrpSpPr>
+        <p:cNvPr id="1" name=""/>
+        <p:cNvGrpSpPr/>
+        <p:nvPr/>
+      </p:nvGrpSpPr>
+      <p:grpSpPr>
+        <a:xfrm>
+          <a:off x="0" y="0"/>
+          <a:ext cx="0" cy="0"/>
+          <a:chOff x="0" y="0"/>
+          <a:chExt cx="0" cy="0"/>
+        </a:xfrm>
+      </p:grpSpPr>
+      <p:sp>
+        <p:nvSpPr>
+          <p:cNvPr id="2" name="Slide Image Placeholder 1"/>
+          <p:cNvSpPr>
+            <a:spLocks noGrp="1" noRot="1" noChangeAspect="1"/>
+          </p:cNvSpPr>
+          <p:nvPr>
+            <p:ph type="sldImg"/>
+          </p:nvPr>
+        </p:nvSpPr>
+        <p:spPr/>
+      </p:sp>
+      <p:sp>
+        <p:nvSpPr>
+          <p:cNvPr id="3" name="Notes Placeholder 2"/>
+          <p:cNvSpPr>
+            <a:spLocks noGrp="1"/>
+          </p:cNvSpPr>
+          <p:nvPr>
+            <p:ph type="body" idx="1"/>
+          </p:nvPr>
+        </p:nvSpPr>
+        <p:spPr/>
+        <p:txBody>
+          <a:bodyPr/>
+          <a:lstStyle/>
+          <a:p>
+            <a:endParaRPr lang="en-US"/>
+          </a:p>
+        </p:txBody>
+      </p:sp>
+      <p:sp>
+        <p:nvSpPr>
+          <p:cNvPr id="4" name="Slide Number Placeholder 3"/>
+          <p:cNvSpPr>
+            <a:spLocks noGrp="1"/>
+          </p:cNvSpPr>
+          <p:nvPr>
+            <p:ph type="sldNum" sz="quarter" idx="5"/>
+          </p:nvPr>
+        </p:nvSpPr>
+        <p:spPr/>
+        <p:txBody>
+          <a:bodyPr/>
+          <a:lstStyle/>
+          <a:p>
+            <a:fld id="{28D5023D-FE11-054C-B5E3-AB75B1BC450A}" type="slidenum">
+              <a:rPr lang="en-US" smtClean="0"/>
+              <a:t>24</a:t>
+            </a:fld>
+            <a:endParaRPr lang="en-US"/>
+          </a:p>
+        </p:txBody>
+      </p:sp>
+    </p:spTree>
+    <p:extLst>
+      <p:ext uri="{BB962C8B-B14F-4D97-AF65-F5344CB8AC3E}">
+        <p14:creationId xmlns:p14="http://schemas.microsoft.com/office/powerpoint/2010/main" val="3114465959"/>
+      </p:ext>
+    </p:extLst>
+  </p:cSld>
+  <p:clrMapOvr>
+    <a:masterClrMapping/>
+  </p:clrMapOvr>
+</p:notes>
+</file>
+
+<file path=ppt/notesSlides/notesSlide25.xml><?xml version="1.0" encoding="utf-8"?>
+<p:notes xmlns:a="http://schemas.openxmlformats.org/drawingml/2006/main" xmlns:r="http://schemas.openxmlformats.org/officeDocument/2006/relationships" xmlns:p="http://schemas.openxmlformats.org/presentationml/2006/main">
+  <p:cSld>
+    <p:spTree>
+      <p:nvGrpSpPr>
+        <p:cNvPr id="1" name=""/>
+        <p:cNvGrpSpPr/>
+        <p:nvPr/>
+      </p:nvGrpSpPr>
+      <p:grpSpPr>
+        <a:xfrm>
+          <a:off x="0" y="0"/>
+          <a:ext cx="0" cy="0"/>
+          <a:chOff x="0" y="0"/>
+          <a:chExt cx="0" cy="0"/>
+        </a:xfrm>
+      </p:grpSpPr>
+      <p:sp>
+        <p:nvSpPr>
+          <p:cNvPr id="2" name="Slide Image Placeholder 1"/>
+          <p:cNvSpPr>
+            <a:spLocks noGrp="1" noRot="1" noChangeAspect="1"/>
+          </p:cNvSpPr>
+          <p:nvPr>
+            <p:ph type="sldImg"/>
+          </p:nvPr>
+        </p:nvSpPr>
+        <p:spPr/>
+      </p:sp>
+      <p:sp>
+        <p:nvSpPr>
+          <p:cNvPr id="3" name="Notes Placeholder 2"/>
+          <p:cNvSpPr>
+            <a:spLocks noGrp="1"/>
+          </p:cNvSpPr>
+          <p:nvPr>
+            <p:ph type="body" idx="1"/>
+          </p:nvPr>
+        </p:nvSpPr>
+        <p:spPr/>
+        <p:txBody>
+          <a:bodyPr/>
+          <a:lstStyle/>
+          <a:p>
+            <a:endParaRPr lang="en-US"/>
+          </a:p>
+        </p:txBody>
+      </p:sp>
+      <p:sp>
+        <p:nvSpPr>
+          <p:cNvPr id="4" name="Slide Number Placeholder 3"/>
+          <p:cNvSpPr>
+            <a:spLocks noGrp="1"/>
+          </p:cNvSpPr>
+          <p:nvPr>
+            <p:ph type="sldNum" sz="quarter" idx="5"/>
+          </p:nvPr>
+        </p:nvSpPr>
+        <p:spPr/>
+        <p:txBody>
+          <a:bodyPr/>
+          <a:lstStyle/>
+          <a:p>
+            <a:fld id="{28D5023D-FE11-054C-B5E3-AB75B1BC450A}" type="slidenum">
+              <a:rPr lang="en-US" smtClean="0"/>
+              <a:t>25</a:t>
+            </a:fld>
+            <a:endParaRPr lang="en-US"/>
+          </a:p>
+        </p:txBody>
+      </p:sp>
+    </p:spTree>
+    <p:extLst>
+      <p:ext uri="{BB962C8B-B14F-4D97-AF65-F5344CB8AC3E}">
+        <p14:creationId xmlns:p14="http://schemas.microsoft.com/office/powerpoint/2010/main" val="2058357158"/>
+      </p:ext>
+    </p:extLst>
+  </p:cSld>
+  <p:clrMapOvr>
+    <a:masterClrMapping/>
+  </p:clrMapOvr>
+</p:notes>
+</file>
+
+<file path=ppt/notesSlides/notesSlide26.xml><?xml version="1.0" encoding="utf-8"?>
+<p:notes xmlns:a="http://schemas.openxmlformats.org/drawingml/2006/main" xmlns:r="http://schemas.openxmlformats.org/officeDocument/2006/relationships" xmlns:p="http://schemas.openxmlformats.org/presentationml/2006/main">
+  <p:cSld>
+    <p:spTree>
+      <p:nvGrpSpPr>
+        <p:cNvPr id="1" name=""/>
+        <p:cNvGrpSpPr/>
+        <p:nvPr/>
+      </p:nvGrpSpPr>
+      <p:grpSpPr>
+        <a:xfrm>
+          <a:off x="0" y="0"/>
+          <a:ext cx="0" cy="0"/>
+          <a:chOff x="0" y="0"/>
+          <a:chExt cx="0" cy="0"/>
+        </a:xfrm>
+      </p:grpSpPr>
+      <p:sp>
+        <p:nvSpPr>
+          <p:cNvPr id="2" name="Slide Image Placeholder 1"/>
+          <p:cNvSpPr>
+            <a:spLocks noGrp="1" noRot="1" noChangeAspect="1"/>
+          </p:cNvSpPr>
+          <p:nvPr>
+            <p:ph type="sldImg"/>
+          </p:nvPr>
+        </p:nvSpPr>
+        <p:spPr/>
+      </p:sp>
+      <p:sp>
+        <p:nvSpPr>
+          <p:cNvPr id="3" name="Notes Placeholder 2"/>
+          <p:cNvSpPr>
+            <a:spLocks noGrp="1"/>
+          </p:cNvSpPr>
+          <p:nvPr>
+            <p:ph type="body" idx="1"/>
+          </p:nvPr>
+        </p:nvSpPr>
+        <p:spPr/>
+        <p:txBody>
+          <a:bodyPr/>
+          <a:lstStyle/>
+          <a:p>
+            <a:endParaRPr lang="en-US"/>
+          </a:p>
+        </p:txBody>
+      </p:sp>
+      <p:sp>
+        <p:nvSpPr>
+          <p:cNvPr id="4" name="Slide Number Placeholder 3"/>
+          <p:cNvSpPr>
+            <a:spLocks noGrp="1"/>
+          </p:cNvSpPr>
+          <p:nvPr>
+            <p:ph type="sldNum" sz="quarter" idx="5"/>
+          </p:nvPr>
+        </p:nvSpPr>
+        <p:spPr/>
+        <p:txBody>
+          <a:bodyPr/>
+          <a:lstStyle/>
+          <a:p>
+            <a:fld id="{28D5023D-FE11-054C-B5E3-AB75B1BC450A}" type="slidenum">
+              <a:rPr lang="en-US" smtClean="0"/>
+              <a:t>26</a:t>
+            </a:fld>
+            <a:endParaRPr lang="en-US"/>
+          </a:p>
+        </p:txBody>
+      </p:sp>
+    </p:spTree>
+    <p:extLst>
+      <p:ext uri="{BB962C8B-B14F-4D97-AF65-F5344CB8AC3E}">
+        <p14:creationId xmlns:p14="http://schemas.microsoft.com/office/powerpoint/2010/main" val="2482195386"/>
+      </p:ext>
+    </p:extLst>
+  </p:cSld>
+  <p:clrMapOvr>
+    <a:masterClrMapping/>
+  </p:clrMapOvr>
+</p:notes>
+</file>
+
+<file path=ppt/notesSlides/notesSlide27.xml><?xml version="1.0" encoding="utf-8"?>
+<p:notes xmlns:a="http://schemas.openxmlformats.org/drawingml/2006/main" xmlns:r="http://schemas.openxmlformats.org/officeDocument/2006/relationships" xmlns:p="http://schemas.openxmlformats.org/presentationml/2006/main">
+  <p:cSld>
+    <p:spTree>
+      <p:nvGrpSpPr>
+        <p:cNvPr id="1" name=""/>
+        <p:cNvGrpSpPr/>
+        <p:nvPr/>
+      </p:nvGrpSpPr>
+      <p:grpSpPr>
+        <a:xfrm>
+          <a:off x="0" y="0"/>
+          <a:ext cx="0" cy="0"/>
+          <a:chOff x="0" y="0"/>
+          <a:chExt cx="0" cy="0"/>
+        </a:xfrm>
+      </p:grpSpPr>
+      <p:sp>
+        <p:nvSpPr>
+          <p:cNvPr id="2" name="Slide Image Placeholder 1"/>
+          <p:cNvSpPr>
+            <a:spLocks noGrp="1" noRot="1" noChangeAspect="1"/>
+          </p:cNvSpPr>
+          <p:nvPr>
+            <p:ph type="sldImg"/>
+          </p:nvPr>
+        </p:nvSpPr>
+        <p:spPr/>
+      </p:sp>
+      <p:sp>
+        <p:nvSpPr>
+          <p:cNvPr id="3" name="Notes Placeholder 2"/>
+          <p:cNvSpPr>
+            <a:spLocks noGrp="1"/>
+          </p:cNvSpPr>
+          <p:nvPr>
+            <p:ph type="body" idx="1"/>
+          </p:nvPr>
+        </p:nvSpPr>
+        <p:spPr/>
+        <p:txBody>
+          <a:bodyPr/>
+          <a:lstStyle/>
+          <a:p>
+            <a:endParaRPr lang="en-US"/>
+          </a:p>
+        </p:txBody>
+      </p:sp>
+      <p:sp>
+        <p:nvSpPr>
+          <p:cNvPr id="4" name="Slide Number Placeholder 3"/>
+          <p:cNvSpPr>
+            <a:spLocks noGrp="1"/>
+          </p:cNvSpPr>
+          <p:nvPr>
+            <p:ph type="sldNum" sz="quarter" idx="5"/>
+          </p:nvPr>
+        </p:nvSpPr>
+        <p:spPr/>
+        <p:txBody>
+          <a:bodyPr/>
+          <a:lstStyle/>
+          <a:p>
+            <a:fld id="{28D5023D-FE11-054C-B5E3-AB75B1BC450A}" type="slidenum">
+              <a:rPr lang="en-US" smtClean="0"/>
+              <a:t>27</a:t>
+            </a:fld>
+            <a:endParaRPr lang="en-US"/>
+          </a:p>
+        </p:txBody>
+      </p:sp>
+    </p:spTree>
+    <p:extLst>
+      <p:ext uri="{BB962C8B-B14F-4D97-AF65-F5344CB8AC3E}">
+        <p14:creationId xmlns:p14="http://schemas.microsoft.com/office/powerpoint/2010/main" val="1270864827"/>
+      </p:ext>
+    </p:extLst>
+  </p:cSld>
+  <p:clrMapOvr>
+    <a:masterClrMapping/>
+  </p:clrMapOvr>
+</p:notes>
+</file>
+
+<file path=ppt/notesSlides/notesSlide28.xml><?xml version="1.0" encoding="utf-8"?>
+<p:notes xmlns:a="http://schemas.openxmlformats.org/drawingml/2006/main" xmlns:r="http://schemas.openxmlformats.org/officeDocument/2006/relationships" xmlns:p="http://schemas.openxmlformats.org/presentationml/2006/main">
+  <p:cSld>
+    <p:spTree>
+      <p:nvGrpSpPr>
+        <p:cNvPr id="1" name=""/>
+        <p:cNvGrpSpPr/>
+        <p:nvPr/>
+      </p:nvGrpSpPr>
+      <p:grpSpPr>
+        <a:xfrm>
+          <a:off x="0" y="0"/>
+          <a:ext cx="0" cy="0"/>
+          <a:chOff x="0" y="0"/>
+          <a:chExt cx="0" cy="0"/>
+        </a:xfrm>
+      </p:grpSpPr>
+      <p:sp>
+        <p:nvSpPr>
+          <p:cNvPr id="2" name="Slide Image Placeholder 1"/>
+          <p:cNvSpPr>
+            <a:spLocks noGrp="1" noRot="1" noChangeAspect="1"/>
+          </p:cNvSpPr>
+          <p:nvPr>
+            <p:ph type="sldImg"/>
+          </p:nvPr>
+        </p:nvSpPr>
+        <p:spPr/>
+      </p:sp>
+      <p:sp>
+        <p:nvSpPr>
+          <p:cNvPr id="3" name="Notes Placeholder 2"/>
+          <p:cNvSpPr>
+            <a:spLocks noGrp="1"/>
+          </p:cNvSpPr>
+          <p:nvPr>
+            <p:ph type="body" idx="1"/>
+          </p:nvPr>
+        </p:nvSpPr>
+        <p:spPr/>
+        <p:txBody>
+          <a:bodyPr/>
+          <a:lstStyle/>
+          <a:p>
+            <a:endParaRPr lang="en-US"/>
+          </a:p>
+        </p:txBody>
+      </p:sp>
+      <p:sp>
+        <p:nvSpPr>
+          <p:cNvPr id="4" name="Slide Number Placeholder 3"/>
+          <p:cNvSpPr>
+            <a:spLocks noGrp="1"/>
+          </p:cNvSpPr>
+          <p:nvPr>
+            <p:ph type="sldNum" sz="quarter" idx="5"/>
+          </p:nvPr>
+        </p:nvSpPr>
+        <p:spPr/>
+        <p:txBody>
+          <a:bodyPr/>
+          <a:lstStyle/>
+          <a:p>
+            <a:fld id="{28D5023D-FE11-054C-B5E3-AB75B1BC450A}" type="slidenum">
+              <a:rPr lang="en-US" smtClean="0"/>
+              <a:t>28</a:t>
+            </a:fld>
+            <a:endParaRPr lang="en-US"/>
+          </a:p>
+        </p:txBody>
+      </p:sp>
+    </p:spTree>
+    <p:extLst>
+      <p:ext uri="{BB962C8B-B14F-4D97-AF65-F5344CB8AC3E}">
+        <p14:creationId xmlns:p14="http://schemas.microsoft.com/office/powerpoint/2010/main" val="628706749"/>
+      </p:ext>
+    </p:extLst>
+  </p:cSld>
+  <p:clrMapOvr>
+    <a:masterClrMapping/>
+  </p:clrMapOvr>
+</p:notes>
+</file>
+
+<file path=ppt/notesSlides/notesSlide29.xml><?xml version="1.0" encoding="utf-8"?>
+<p:notes xmlns:a="http://schemas.openxmlformats.org/drawingml/2006/main" xmlns:r="http://schemas.openxmlformats.org/officeDocument/2006/relationships" xmlns:p="http://schemas.openxmlformats.org/presentationml/2006/main">
+  <p:cSld>
+    <p:spTree>
+      <p:nvGrpSpPr>
+        <p:cNvPr id="1" name=""/>
+        <p:cNvGrpSpPr/>
+        <p:nvPr/>
+      </p:nvGrpSpPr>
+      <p:grpSpPr>
+        <a:xfrm>
+          <a:off x="0" y="0"/>
+          <a:ext cx="0" cy="0"/>
+          <a:chOff x="0" y="0"/>
+          <a:chExt cx="0" cy="0"/>
+        </a:xfrm>
+      </p:grpSpPr>
+      <p:sp>
+        <p:nvSpPr>
+          <p:cNvPr id="2" name="Slide Image Placeholder 1"/>
+          <p:cNvSpPr>
+            <a:spLocks noGrp="1" noRot="1" noChangeAspect="1"/>
+          </p:cNvSpPr>
+          <p:nvPr>
+            <p:ph type="sldImg"/>
+          </p:nvPr>
+        </p:nvSpPr>
+        <p:spPr/>
+      </p:sp>
+      <p:sp>
+        <p:nvSpPr>
+          <p:cNvPr id="3" name="Notes Placeholder 2"/>
+          <p:cNvSpPr>
+            <a:spLocks noGrp="1"/>
+          </p:cNvSpPr>
+          <p:nvPr>
+            <p:ph type="body" idx="1"/>
+          </p:nvPr>
+        </p:nvSpPr>
+        <p:spPr/>
+        <p:txBody>
+          <a:bodyPr/>
+          <a:lstStyle/>
+          <a:p>
+            <a:endParaRPr lang="en-US"/>
+          </a:p>
+        </p:txBody>
+      </p:sp>
+      <p:sp>
+        <p:nvSpPr>
+          <p:cNvPr id="4" name="Slide Number Placeholder 3"/>
+          <p:cNvSpPr>
+            <a:spLocks noGrp="1"/>
+          </p:cNvSpPr>
+          <p:nvPr>
+            <p:ph type="sldNum" sz="quarter" idx="5"/>
+          </p:nvPr>
+        </p:nvSpPr>
+        <p:spPr/>
+        <p:txBody>
+          <a:bodyPr/>
+          <a:lstStyle/>
+          <a:p>
+            <a:fld id="{28D5023D-FE11-054C-B5E3-AB75B1BC450A}" type="slidenum">
+              <a:rPr lang="en-US" smtClean="0"/>
+              <a:t>29</a:t>
+            </a:fld>
+            <a:endParaRPr lang="en-US"/>
+          </a:p>
+        </p:txBody>
+      </p:sp>
+    </p:spTree>
+    <p:extLst>
+      <p:ext uri="{BB962C8B-B14F-4D97-AF65-F5344CB8AC3E}">
+        <p14:creationId xmlns:p14="http://schemas.microsoft.com/office/powerpoint/2010/main" val="734893038"/>
+      </p:ext>
+    </p:extLst>
+  </p:cSld>
+  <p:clrMapOvr>
+    <a:masterClrMapping/>
+  </p:clrMapOvr>
+</p:notes>
+</file>
+
+<file path=ppt/notesSlides/notesSlide3.xml><?xml version="1.0" encoding="utf-8"?>
+<p:notes xmlns:a="http://schemas.openxmlformats.org/drawingml/2006/main" xmlns:r="http://schemas.openxmlformats.org/officeDocument/2006/relationships" xmlns:p="http://schemas.openxmlformats.org/presentationml/2006/main">
+  <p:cSld>
+    <p:spTree>
+      <p:nvGrpSpPr>
+        <p:cNvPr id="1" name=""/>
+        <p:cNvGrpSpPr/>
+        <p:nvPr/>
+      </p:nvGrpSpPr>
+      <p:grpSpPr>
+        <a:xfrm>
+          <a:off x="0" y="0"/>
+          <a:ext cx="0" cy="0"/>
+          <a:chOff x="0" y="0"/>
+          <a:chExt cx="0" cy="0"/>
+        </a:xfrm>
+      </p:grpSpPr>
+      <p:sp>
+        <p:nvSpPr>
+          <p:cNvPr id="2" name="Slide Image Placeholder 1"/>
+          <p:cNvSpPr>
+            <a:spLocks noGrp="1" noRot="1" noChangeAspect="1"/>
+          </p:cNvSpPr>
+          <p:nvPr>
+            <p:ph type="sldImg"/>
+          </p:nvPr>
+        </p:nvSpPr>
+        <p:spPr/>
+      </p:sp>
+      <p:sp>
+        <p:nvSpPr>
+          <p:cNvPr id="3" name="Notes Placeholder 2"/>
+          <p:cNvSpPr>
+            <a:spLocks noGrp="1"/>
+          </p:cNvSpPr>
+          <p:nvPr>
+            <p:ph type="body" idx="1"/>
+          </p:nvPr>
+        </p:nvSpPr>
+        <p:spPr/>
+        <p:txBody>
+          <a:bodyPr/>
+          <a:lstStyle/>
+          <a:p>
+            <a:endParaRPr lang="en-US"/>
+          </a:p>
+        </p:txBody>
+      </p:sp>
+      <p:sp>
+        <p:nvSpPr>
+          <p:cNvPr id="4" name="Slide Number Placeholder 3"/>
+          <p:cNvSpPr>
+            <a:spLocks noGrp="1"/>
+          </p:cNvSpPr>
+          <p:nvPr>
+            <p:ph type="sldNum" sz="quarter" idx="5"/>
+          </p:nvPr>
+        </p:nvSpPr>
+        <p:spPr/>
+        <p:txBody>
+          <a:bodyPr/>
+          <a:lstStyle/>
+          <a:p>
+            <a:fld id="{28D5023D-FE11-054C-B5E3-AB75B1BC450A}" type="slidenum">
+              <a:rPr lang="en-US" smtClean="0"/>
+              <a:t>3</a:t>
+            </a:fld>
+            <a:endParaRPr lang="en-US"/>
+          </a:p>
+        </p:txBody>
+      </p:sp>
+    </p:spTree>
+    <p:extLst>
+      <p:ext uri="{BB962C8B-B14F-4D97-AF65-F5344CB8AC3E}">
+        <p14:creationId xmlns:p14="http://schemas.microsoft.com/office/powerpoint/2010/main" val="459779775"/>
+      </p:ext>
+    </p:extLst>
+  </p:cSld>
+  <p:clrMapOvr>
+    <a:masterClrMapping/>
+  </p:clrMapOvr>
+</p:notes>
+</file>
+
+<file path=ppt/notesSlides/notesSlide30.xml><?xml version="1.0" encoding="utf-8"?>
+<p:notes xmlns:a="http://schemas.openxmlformats.org/drawingml/2006/main" xmlns:r="http://schemas.openxmlformats.org/officeDocument/2006/relationships" xmlns:p="http://schemas.openxmlformats.org/presentationml/2006/main">
+  <p:cSld>
+    <p:spTree>
+      <p:nvGrpSpPr>
+        <p:cNvPr id="1" name=""/>
+        <p:cNvGrpSpPr/>
+        <p:nvPr/>
+      </p:nvGrpSpPr>
+      <p:grpSpPr>
+        <a:xfrm>
+          <a:off x="0" y="0"/>
+          <a:ext cx="0" cy="0"/>
+          <a:chOff x="0" y="0"/>
+          <a:chExt cx="0" cy="0"/>
+        </a:xfrm>
+      </p:grpSpPr>
+      <p:sp>
+        <p:nvSpPr>
+          <p:cNvPr id="2" name="Slide Image Placeholder 1"/>
+          <p:cNvSpPr>
+            <a:spLocks noGrp="1" noRot="1" noChangeAspect="1"/>
+          </p:cNvSpPr>
+          <p:nvPr>
+            <p:ph type="sldImg"/>
+          </p:nvPr>
+        </p:nvSpPr>
+        <p:spPr/>
+      </p:sp>
+      <p:sp>
+        <p:nvSpPr>
+          <p:cNvPr id="3" name="Notes Placeholder 2"/>
+          <p:cNvSpPr>
+            <a:spLocks noGrp="1"/>
+          </p:cNvSpPr>
+          <p:nvPr>
+            <p:ph type="body" idx="1"/>
+          </p:nvPr>
+        </p:nvSpPr>
+        <p:spPr/>
+        <p:txBody>
+          <a:bodyPr/>
+          <a:lstStyle/>
+          <a:p>
+            <a:endParaRPr lang="en-US"/>
+          </a:p>
+        </p:txBody>
+      </p:sp>
+      <p:sp>
+        <p:nvSpPr>
+          <p:cNvPr id="4" name="Slide Number Placeholder 3"/>
+          <p:cNvSpPr>
+            <a:spLocks noGrp="1"/>
+          </p:cNvSpPr>
+          <p:nvPr>
+            <p:ph type="sldNum" sz="quarter" idx="5"/>
+          </p:nvPr>
+        </p:nvSpPr>
+        <p:spPr/>
+        <p:txBody>
+          <a:bodyPr/>
+          <a:lstStyle/>
+          <a:p>
+            <a:fld id="{28D5023D-FE11-054C-B5E3-AB75B1BC450A}" type="slidenum">
+              <a:rPr lang="en-US" smtClean="0"/>
+              <a:t>30</a:t>
+            </a:fld>
+            <a:endParaRPr lang="en-US"/>
+          </a:p>
+        </p:txBody>
+      </p:sp>
+    </p:spTree>
+    <p:extLst>
+      <p:ext uri="{BB962C8B-B14F-4D97-AF65-F5344CB8AC3E}">
+        <p14:creationId xmlns:p14="http://schemas.microsoft.com/office/powerpoint/2010/main" val="460334535"/>
+      </p:ext>
+    </p:extLst>
+  </p:cSld>
+  <p:clrMapOvr>
+    <a:masterClrMapping/>
+  </p:clrMapOvr>
+</p:notes>
+</file>
+
+<file path=ppt/notesSlides/notesSlide31.xml><?xml version="1.0" encoding="utf-8"?>
+<p:notes xmlns:a="http://schemas.openxmlformats.org/drawingml/2006/main" xmlns:r="http://schemas.openxmlformats.org/officeDocument/2006/relationships" xmlns:p="http://schemas.openxmlformats.org/presentationml/2006/main">
+  <p:cSld>
+    <p:spTree>
+      <p:nvGrpSpPr>
+        <p:cNvPr id="1" name=""/>
+        <p:cNvGrpSpPr/>
+        <p:nvPr/>
+      </p:nvGrpSpPr>
+      <p:grpSpPr>
+        <a:xfrm>
+          <a:off x="0" y="0"/>
+          <a:ext cx="0" cy="0"/>
+          <a:chOff x="0" y="0"/>
+          <a:chExt cx="0" cy="0"/>
+        </a:xfrm>
+      </p:grpSpPr>
+      <p:sp>
+        <p:nvSpPr>
+          <p:cNvPr id="2" name="Slide Image Placeholder 1"/>
+          <p:cNvSpPr>
+            <a:spLocks noGrp="1" noRot="1" noChangeAspect="1"/>
+          </p:cNvSpPr>
+          <p:nvPr>
+            <p:ph type="sldImg"/>
+          </p:nvPr>
+        </p:nvSpPr>
+        <p:spPr/>
+      </p:sp>
+      <p:sp>
+        <p:nvSpPr>
+          <p:cNvPr id="3" name="Notes Placeholder 2"/>
+          <p:cNvSpPr>
+            <a:spLocks noGrp="1"/>
+          </p:cNvSpPr>
+          <p:nvPr>
+            <p:ph type="body" idx="1"/>
+          </p:nvPr>
+        </p:nvSpPr>
+        <p:spPr/>
+        <p:txBody>
+          <a:bodyPr/>
+          <a:lstStyle/>
+          <a:p>
+            <a:endParaRPr lang="en-US"/>
+          </a:p>
+        </p:txBody>
+      </p:sp>
+      <p:sp>
+        <p:nvSpPr>
+          <p:cNvPr id="4" name="Slide Number Placeholder 3"/>
+          <p:cNvSpPr>
+            <a:spLocks noGrp="1"/>
+          </p:cNvSpPr>
+          <p:nvPr>
+            <p:ph type="sldNum" sz="quarter" idx="5"/>
+          </p:nvPr>
+        </p:nvSpPr>
+        <p:spPr/>
+        <p:txBody>
+          <a:bodyPr/>
+          <a:lstStyle/>
+          <a:p>
+            <a:fld id="{28D5023D-FE11-054C-B5E3-AB75B1BC450A}" type="slidenum">
+              <a:rPr lang="en-US" smtClean="0"/>
+              <a:t>31</a:t>
+            </a:fld>
+            <a:endParaRPr lang="en-US"/>
+          </a:p>
+        </p:txBody>
+      </p:sp>
+    </p:spTree>
+    <p:extLst>
+      <p:ext uri="{BB962C8B-B14F-4D97-AF65-F5344CB8AC3E}">
+        <p14:creationId xmlns:p14="http://schemas.microsoft.com/office/powerpoint/2010/main" val="876652760"/>
+      </p:ext>
+    </p:extLst>
+  </p:cSld>
+  <p:clrMapOvr>
+    <a:masterClrMapping/>
+  </p:clrMapOvr>
+</p:notes>
+</file>
+
+<file path=ppt/notesSlides/notesSlide32.xml><?xml version="1.0" encoding="utf-8"?>
+<p:notes xmlns:a="http://schemas.openxmlformats.org/drawingml/2006/main" xmlns:r="http://schemas.openxmlformats.org/officeDocument/2006/relationships" xmlns:p="http://schemas.openxmlformats.org/presentationml/2006/main">
+  <p:cSld>
+    <p:spTree>
+      <p:nvGrpSpPr>
+        <p:cNvPr id="1" name=""/>
+        <p:cNvGrpSpPr/>
+        <p:nvPr/>
+      </p:nvGrpSpPr>
+      <p:grpSpPr>
+        <a:xfrm>
+          <a:off x="0" y="0"/>
+          <a:ext cx="0" cy="0"/>
+          <a:chOff x="0" y="0"/>
+          <a:chExt cx="0" cy="0"/>
+        </a:xfrm>
+      </p:grpSpPr>
+      <p:sp>
+        <p:nvSpPr>
+          <p:cNvPr id="2" name="Slide Image Placeholder 1"/>
+          <p:cNvSpPr>
+            <a:spLocks noGrp="1" noRot="1" noChangeAspect="1"/>
+          </p:cNvSpPr>
+          <p:nvPr>
+            <p:ph type="sldImg"/>
+          </p:nvPr>
+        </p:nvSpPr>
+        <p:spPr/>
+      </p:sp>
+      <p:sp>
+        <p:nvSpPr>
+          <p:cNvPr id="3" name="Notes Placeholder 2"/>
+          <p:cNvSpPr>
+            <a:spLocks noGrp="1"/>
+          </p:cNvSpPr>
+          <p:nvPr>
+            <p:ph type="body" idx="1"/>
+          </p:nvPr>
+        </p:nvSpPr>
+        <p:spPr/>
+        <p:txBody>
+          <a:bodyPr/>
+          <a:lstStyle/>
+          <a:p>
+            <a:endParaRPr lang="en-US"/>
+          </a:p>
+        </p:txBody>
+      </p:sp>
+      <p:sp>
+        <p:nvSpPr>
+          <p:cNvPr id="4" name="Slide Number Placeholder 3"/>
+          <p:cNvSpPr>
+            <a:spLocks noGrp="1"/>
+          </p:cNvSpPr>
+          <p:nvPr>
+            <p:ph type="sldNum" sz="quarter" idx="5"/>
+          </p:nvPr>
+        </p:nvSpPr>
+        <p:spPr/>
+        <p:txBody>
+          <a:bodyPr/>
+          <a:lstStyle/>
+          <a:p>
+            <a:fld id="{28D5023D-FE11-054C-B5E3-AB75B1BC450A}" type="slidenum">
+              <a:rPr lang="en-US" smtClean="0"/>
+              <a:t>32</a:t>
+            </a:fld>
+            <a:endParaRPr lang="en-US"/>
+          </a:p>
+        </p:txBody>
+      </p:sp>
+    </p:spTree>
+    <p:extLst>
+      <p:ext uri="{BB962C8B-B14F-4D97-AF65-F5344CB8AC3E}">
+        <p14:creationId xmlns:p14="http://schemas.microsoft.com/office/powerpoint/2010/main" val="141407837"/>
+      </p:ext>
+    </p:extLst>
+  </p:cSld>
+  <p:clrMapOvr>
+    <a:masterClrMapping/>
+  </p:clrMapOvr>
+</p:notes>
+</file>
+
+<file path=ppt/notesSlides/notesSlide33.xml><?xml version="1.0" encoding="utf-8"?>
+<p:notes xmlns:a="http://schemas.openxmlformats.org/drawingml/2006/main" xmlns:r="http://schemas.openxmlformats.org/officeDocument/2006/relationships" xmlns:p="http://schemas.openxmlformats.org/presentationml/2006/main">
+  <p:cSld>
+    <p:spTree>
+      <p:nvGrpSpPr>
+        <p:cNvPr id="1" name=""/>
+        <p:cNvGrpSpPr/>
+        <p:nvPr/>
+      </p:nvGrpSpPr>
+      <p:grpSpPr>
+        <a:xfrm>
+          <a:off x="0" y="0"/>
+          <a:ext cx="0" cy="0"/>
+          <a:chOff x="0" y="0"/>
+          <a:chExt cx="0" cy="0"/>
+        </a:xfrm>
+      </p:grpSpPr>
+      <p:sp>
+        <p:nvSpPr>
+          <p:cNvPr id="2" name="Slide Image Placeholder 1"/>
+          <p:cNvSpPr>
+            <a:spLocks noGrp="1" noRot="1" noChangeAspect="1"/>
+          </p:cNvSpPr>
+          <p:nvPr>
+            <p:ph type="sldImg"/>
+          </p:nvPr>
+        </p:nvSpPr>
+        <p:spPr/>
+      </p:sp>
+      <p:sp>
+        <p:nvSpPr>
+          <p:cNvPr id="3" name="Notes Placeholder 2"/>
+          <p:cNvSpPr>
+            <a:spLocks noGrp="1"/>
+          </p:cNvSpPr>
+          <p:nvPr>
+            <p:ph type="body" idx="1"/>
+          </p:nvPr>
+        </p:nvSpPr>
+        <p:spPr/>
+        <p:txBody>
+          <a:bodyPr/>
+          <a:lstStyle/>
+          <a:p>
+            <a:endParaRPr lang="en-US"/>
+          </a:p>
+        </p:txBody>
+      </p:sp>
+      <p:sp>
+        <p:nvSpPr>
+          <p:cNvPr id="4" name="Slide Number Placeholder 3"/>
+          <p:cNvSpPr>
+            <a:spLocks noGrp="1"/>
+          </p:cNvSpPr>
+          <p:nvPr>
+            <p:ph type="sldNum" sz="quarter" idx="5"/>
+          </p:nvPr>
+        </p:nvSpPr>
+        <p:spPr/>
+        <p:txBody>
+          <a:bodyPr/>
+          <a:lstStyle/>
+          <a:p>
+            <a:fld id="{28D5023D-FE11-054C-B5E3-AB75B1BC450A}" type="slidenum">
+              <a:rPr lang="en-US" smtClean="0"/>
+              <a:t>33</a:t>
+            </a:fld>
+            <a:endParaRPr lang="en-US"/>
+          </a:p>
+        </p:txBody>
+      </p:sp>
+    </p:spTree>
+    <p:extLst>
+      <p:ext uri="{BB962C8B-B14F-4D97-AF65-F5344CB8AC3E}">
+        <p14:creationId xmlns:p14="http://schemas.microsoft.com/office/powerpoint/2010/main" val="889963645"/>
+      </p:ext>
+    </p:extLst>
+  </p:cSld>
+  <p:clrMapOvr>
+    <a:masterClrMapping/>
+  </p:clrMapOvr>
+</p:notes>
+</file>
+
+<file path=ppt/notesSlides/notesSlide34.xml><?xml version="1.0" encoding="utf-8"?>
+<p:notes xmlns:a="http://schemas.openxmlformats.org/drawingml/2006/main" xmlns:r="http://schemas.openxmlformats.org/officeDocument/2006/relationships" xmlns:p="http://schemas.openxmlformats.org/presentationml/2006/main">
+  <p:cSld>
+    <p:spTree>
+      <p:nvGrpSpPr>
+        <p:cNvPr id="1" name=""/>
+        <p:cNvGrpSpPr/>
+        <p:nvPr/>
+      </p:nvGrpSpPr>
+      <p:grpSpPr>
+        <a:xfrm>
+          <a:off x="0" y="0"/>
+          <a:ext cx="0" cy="0"/>
+          <a:chOff x="0" y="0"/>
+          <a:chExt cx="0" cy="0"/>
+        </a:xfrm>
+      </p:grpSpPr>
+      <p:sp>
+        <p:nvSpPr>
+          <p:cNvPr id="2" name="Slide Image Placeholder 1"/>
+          <p:cNvSpPr>
+            <a:spLocks noGrp="1" noRot="1" noChangeAspect="1"/>
+          </p:cNvSpPr>
+          <p:nvPr>
+            <p:ph type="sldImg"/>
+          </p:nvPr>
+        </p:nvSpPr>
+        <p:spPr/>
+      </p:sp>
+      <p:sp>
+        <p:nvSpPr>
+          <p:cNvPr id="3" name="Notes Placeholder 2"/>
+          <p:cNvSpPr>
+            <a:spLocks noGrp="1"/>
+          </p:cNvSpPr>
+          <p:nvPr>
+            <p:ph type="body" idx="1"/>
+          </p:nvPr>
+        </p:nvSpPr>
+        <p:spPr/>
+        <p:txBody>
+          <a:bodyPr/>
+          <a:lstStyle/>
+          <a:p>
+            <a:endParaRPr lang="en-US"/>
+          </a:p>
+        </p:txBody>
+      </p:sp>
+      <p:sp>
+        <p:nvSpPr>
+          <p:cNvPr id="4" name="Slide Number Placeholder 3"/>
+          <p:cNvSpPr>
+            <a:spLocks noGrp="1"/>
+          </p:cNvSpPr>
+          <p:nvPr>
+            <p:ph type="sldNum" sz="quarter" idx="5"/>
+          </p:nvPr>
+        </p:nvSpPr>
+        <p:spPr/>
+        <p:txBody>
+          <a:bodyPr/>
+          <a:lstStyle/>
+          <a:p>
+            <a:fld id="{28D5023D-FE11-054C-B5E3-AB75B1BC450A}" type="slidenum">
+              <a:rPr lang="en-US" smtClean="0"/>
+              <a:t>34</a:t>
+            </a:fld>
+            <a:endParaRPr lang="en-US"/>
+          </a:p>
+        </p:txBody>
+      </p:sp>
+    </p:spTree>
+    <p:extLst>
+      <p:ext uri="{BB962C8B-B14F-4D97-AF65-F5344CB8AC3E}">
+        <p14:creationId xmlns:p14="http://schemas.microsoft.com/office/powerpoint/2010/main" val="4083253746"/>
+      </p:ext>
+    </p:extLst>
+  </p:cSld>
+  <p:clrMapOvr>
+    <a:masterClrMapping/>
+  </p:clrMapOvr>
+</p:notes>
+</file>
+
+<file path=ppt/notesSlides/notesSlide35.xml><?xml version="1.0" encoding="utf-8"?>
+<p:notes xmlns:a="http://schemas.openxmlformats.org/drawingml/2006/main" xmlns:r="http://schemas.openxmlformats.org/officeDocument/2006/relationships" xmlns:p="http://schemas.openxmlformats.org/presentationml/2006/main">
+  <p:cSld>
+    <p:spTree>
+      <p:nvGrpSpPr>
+        <p:cNvPr id="1" name=""/>
+        <p:cNvGrpSpPr/>
+        <p:nvPr/>
+      </p:nvGrpSpPr>
+      <p:grpSpPr>
+        <a:xfrm>
+          <a:off x="0" y="0"/>
+          <a:ext cx="0" cy="0"/>
+          <a:chOff x="0" y="0"/>
+          <a:chExt cx="0" cy="0"/>
+        </a:xfrm>
+      </p:grpSpPr>
+      <p:sp>
+        <p:nvSpPr>
+          <p:cNvPr id="2" name="Slide Image Placeholder 1"/>
+          <p:cNvSpPr>
+            <a:spLocks noGrp="1" noRot="1" noChangeAspect="1"/>
+          </p:cNvSpPr>
+          <p:nvPr>
+            <p:ph type="sldImg"/>
+          </p:nvPr>
+        </p:nvSpPr>
+        <p:spPr/>
+      </p:sp>
+      <p:sp>
+        <p:nvSpPr>
+          <p:cNvPr id="3" name="Notes Placeholder 2"/>
+          <p:cNvSpPr>
+            <a:spLocks noGrp="1"/>
+          </p:cNvSpPr>
+          <p:nvPr>
+            <p:ph type="body" idx="1"/>
+          </p:nvPr>
+        </p:nvSpPr>
+        <p:spPr/>
+        <p:txBody>
+          <a:bodyPr/>
+          <a:lstStyle/>
+          <a:p>
+            <a:endParaRPr lang="en-US"/>
+          </a:p>
+        </p:txBody>
+      </p:sp>
+      <p:sp>
+        <p:nvSpPr>
+          <p:cNvPr id="4" name="Slide Number Placeholder 3"/>
+          <p:cNvSpPr>
+            <a:spLocks noGrp="1"/>
+          </p:cNvSpPr>
+          <p:nvPr>
+            <p:ph type="sldNum" sz="quarter" idx="5"/>
+          </p:nvPr>
+        </p:nvSpPr>
+        <p:spPr/>
+        <p:txBody>
+          <a:bodyPr/>
+          <a:lstStyle/>
+          <a:p>
+            <a:fld id="{28D5023D-FE11-054C-B5E3-AB75B1BC450A}" type="slidenum">
+              <a:rPr lang="en-US" smtClean="0"/>
+              <a:t>35</a:t>
+            </a:fld>
+            <a:endParaRPr lang="en-US"/>
+          </a:p>
+        </p:txBody>
+      </p:sp>
+    </p:spTree>
+    <p:extLst>
+      <p:ext uri="{BB962C8B-B14F-4D97-AF65-F5344CB8AC3E}">
+        <p14:creationId xmlns:p14="http://schemas.microsoft.com/office/powerpoint/2010/main" val="1830818958"/>
+      </p:ext>
+    </p:extLst>
+  </p:cSld>
+  <p:clrMapOvr>
+    <a:masterClrMapping/>
+  </p:clrMapOvr>
+</p:notes>
+</file>
+
+<file path=ppt/notesSlides/notesSlide4.xml><?xml version="1.0" encoding="utf-8"?>
+<p:notes xmlns:a="http://schemas.openxmlformats.org/drawingml/2006/main" xmlns:r="http://schemas.openxmlformats.org/officeDocument/2006/relationships" xmlns:p="http://schemas.openxmlformats.org/presentationml/2006/main">
+  <p:cSld>
+    <p:spTree>
+      <p:nvGrpSpPr>
+        <p:cNvPr id="1" name=""/>
+        <p:cNvGrpSpPr/>
+        <p:nvPr/>
+      </p:nvGrpSpPr>
+      <p:grpSpPr>
+        <a:xfrm>
+          <a:off x="0" y="0"/>
+          <a:ext cx="0" cy="0"/>
+          <a:chOff x="0" y="0"/>
+          <a:chExt cx="0" cy="0"/>
+        </a:xfrm>
+      </p:grpSpPr>
+      <p:sp>
+        <p:nvSpPr>
+          <p:cNvPr id="2" name="Slide Image Placeholder 1"/>
+          <p:cNvSpPr>
+            <a:spLocks noGrp="1" noRot="1" noChangeAspect="1"/>
+          </p:cNvSpPr>
+          <p:nvPr>
+            <p:ph type="sldImg"/>
+          </p:nvPr>
+        </p:nvSpPr>
+        <p:spPr/>
+      </p:sp>
+      <p:sp>
+        <p:nvSpPr>
+          <p:cNvPr id="3" name="Notes Placeholder 2"/>
+          <p:cNvSpPr>
+            <a:spLocks noGrp="1"/>
+          </p:cNvSpPr>
+          <p:nvPr>
+            <p:ph type="body" idx="1"/>
+          </p:nvPr>
+        </p:nvSpPr>
+        <p:spPr/>
+        <p:txBody>
+          <a:bodyPr/>
+          <a:lstStyle/>
+          <a:p>
+            <a:endParaRPr lang="en-US"/>
+          </a:p>
+        </p:txBody>
+      </p:sp>
+      <p:sp>
+        <p:nvSpPr>
+          <p:cNvPr id="4" name="Slide Number Placeholder 3"/>
+          <p:cNvSpPr>
+            <a:spLocks noGrp="1"/>
+          </p:cNvSpPr>
+          <p:nvPr>
+            <p:ph type="sldNum" sz="quarter" idx="5"/>
+          </p:nvPr>
+        </p:nvSpPr>
+        <p:spPr/>
+        <p:txBody>
+          <a:bodyPr/>
+          <a:lstStyle/>
+          <a:p>
+            <a:fld id="{28D5023D-FE11-054C-B5E3-AB75B1BC450A}" type="slidenum">
+              <a:rPr lang="en-US" smtClean="0"/>
+              <a:t>4</a:t>
+            </a:fld>
+            <a:endParaRPr lang="en-US"/>
+          </a:p>
+        </p:txBody>
+      </p:sp>
+    </p:spTree>
+    <p:extLst>
+      <p:ext uri="{BB962C8B-B14F-4D97-AF65-F5344CB8AC3E}">
+        <p14:creationId xmlns:p14="http://schemas.microsoft.com/office/powerpoint/2010/main" val="3006108504"/>
+      </p:ext>
+    </p:extLst>
+  </p:cSld>
+  <p:clrMapOvr>
+    <a:masterClrMapping/>
+  </p:clrMapOvr>
+</p:notes>
+</file>
+
+<file path=ppt/notesSlides/notesSlide5.xml><?xml version="1.0" encoding="utf-8"?>
+<p:notes xmlns:a="http://schemas.openxmlformats.org/drawingml/2006/main" xmlns:r="http://schemas.openxmlformats.org/officeDocument/2006/relationships" xmlns:p="http://schemas.openxmlformats.org/presentationml/2006/main">
+  <p:cSld>
+    <p:spTree>
+      <p:nvGrpSpPr>
+        <p:cNvPr id="1" name=""/>
+        <p:cNvGrpSpPr/>
+        <p:nvPr/>
+      </p:nvGrpSpPr>
+      <p:grpSpPr>
+        <a:xfrm>
+          <a:off x="0" y="0"/>
+          <a:ext cx="0" cy="0"/>
+          <a:chOff x="0" y="0"/>
+          <a:chExt cx="0" cy="0"/>
+        </a:xfrm>
+      </p:grpSpPr>
+      <p:sp>
+        <p:nvSpPr>
+          <p:cNvPr id="2" name="Slide Image Placeholder 1"/>
+          <p:cNvSpPr>
+            <a:spLocks noGrp="1" noRot="1" noChangeAspect="1"/>
+          </p:cNvSpPr>
+          <p:nvPr>
+            <p:ph type="sldImg"/>
+          </p:nvPr>
+        </p:nvSpPr>
+        <p:spPr/>
+      </p:sp>
+      <p:sp>
+        <p:nvSpPr>
+          <p:cNvPr id="3" name="Notes Placeholder 2"/>
+          <p:cNvSpPr>
+            <a:spLocks noGrp="1"/>
+          </p:cNvSpPr>
+          <p:nvPr>
+            <p:ph type="body" idx="1"/>
+          </p:nvPr>
+        </p:nvSpPr>
+        <p:spPr/>
+        <p:txBody>
+          <a:bodyPr/>
+          <a:lstStyle/>
+          <a:p>
+            <a:endParaRPr lang="en-US"/>
+          </a:p>
+        </p:txBody>
+      </p:sp>
+      <p:sp>
+        <p:nvSpPr>
+          <p:cNvPr id="4" name="Slide Number Placeholder 3"/>
+          <p:cNvSpPr>
+            <a:spLocks noGrp="1"/>
+          </p:cNvSpPr>
+          <p:nvPr>
+            <p:ph type="sldNum" sz="quarter" idx="5"/>
+          </p:nvPr>
+        </p:nvSpPr>
+        <p:spPr/>
+        <p:txBody>
+          <a:bodyPr/>
+          <a:lstStyle/>
+          <a:p>
+            <a:fld id="{28D5023D-FE11-054C-B5E3-AB75B1BC450A}" type="slidenum">
+              <a:rPr lang="en-US" smtClean="0"/>
+              <a:t>5</a:t>
+            </a:fld>
+            <a:endParaRPr lang="en-US"/>
+          </a:p>
+        </p:txBody>
+      </p:sp>
+    </p:spTree>
+    <p:extLst>
+      <p:ext uri="{BB962C8B-B14F-4D97-AF65-F5344CB8AC3E}">
+        <p14:creationId xmlns:p14="http://schemas.microsoft.com/office/powerpoint/2010/main" val="2561576179"/>
+      </p:ext>
+    </p:extLst>
+  </p:cSld>
+  <p:clrMapOvr>
+    <a:masterClrMapping/>
+  </p:clrMapOvr>
+</p:notes>
+</file>
+
+<file path=ppt/notesSlides/notesSlide6.xml><?xml version="1.0" encoding="utf-8"?>
+<p:notes xmlns:a="http://schemas.openxmlformats.org/drawingml/2006/main" xmlns:r="http://schemas.openxmlformats.org/officeDocument/2006/relationships" xmlns:p="http://schemas.openxmlformats.org/presentationml/2006/main">
+  <p:cSld>
+    <p:spTree>
+      <p:nvGrpSpPr>
+        <p:cNvPr id="1" name=""/>
+        <p:cNvGrpSpPr/>
+        <p:nvPr/>
+      </p:nvGrpSpPr>
+      <p:grpSpPr>
+        <a:xfrm>
+          <a:off x="0" y="0"/>
+          <a:ext cx="0" cy="0"/>
+          <a:chOff x="0" y="0"/>
+          <a:chExt cx="0" cy="0"/>
+        </a:xfrm>
+      </p:grpSpPr>
+      <p:sp>
+        <p:nvSpPr>
+          <p:cNvPr id="2" name="Slide Image Placeholder 1"/>
+          <p:cNvSpPr>
+            <a:spLocks noGrp="1" noRot="1" noChangeAspect="1"/>
+          </p:cNvSpPr>
+          <p:nvPr>
+            <p:ph type="sldImg"/>
+          </p:nvPr>
+        </p:nvSpPr>
+        <p:spPr/>
+      </p:sp>
+      <p:sp>
+        <p:nvSpPr>
+          <p:cNvPr id="3" name="Notes Placeholder 2"/>
+          <p:cNvSpPr>
+            <a:spLocks noGrp="1"/>
+          </p:cNvSpPr>
+          <p:nvPr>
+            <p:ph type="body" idx="1"/>
+          </p:nvPr>
+        </p:nvSpPr>
+        <p:spPr/>
+        <p:txBody>
+          <a:bodyPr/>
+          <a:lstStyle/>
+          <a:p>
+            <a:endParaRPr lang="en-US"/>
+          </a:p>
+        </p:txBody>
+      </p:sp>
+      <p:sp>
+        <p:nvSpPr>
+          <p:cNvPr id="4" name="Slide Number Placeholder 3"/>
+          <p:cNvSpPr>
+            <a:spLocks noGrp="1"/>
+          </p:cNvSpPr>
+          <p:nvPr>
+            <p:ph type="sldNum" sz="quarter" idx="5"/>
+          </p:nvPr>
+        </p:nvSpPr>
+        <p:spPr/>
+        <p:txBody>
+          <a:bodyPr/>
+          <a:lstStyle/>
+          <a:p>
+            <a:fld id="{28D5023D-FE11-054C-B5E3-AB75B1BC450A}" type="slidenum">
+              <a:rPr lang="en-US" smtClean="0"/>
+              <a:t>6</a:t>
+            </a:fld>
+            <a:endParaRPr lang="en-US"/>
+          </a:p>
+        </p:txBody>
+      </p:sp>
+    </p:spTree>
+    <p:extLst>
+      <p:ext uri="{BB962C8B-B14F-4D97-AF65-F5344CB8AC3E}">
+        <p14:creationId xmlns:p14="http://schemas.microsoft.com/office/powerpoint/2010/main" val="2716656990"/>
+      </p:ext>
+    </p:extLst>
+  </p:cSld>
+  <p:clrMapOvr>
+    <a:masterClrMapping/>
+  </p:clrMapOvr>
+</p:notes>
+</file>
+
+<file path=ppt/notesSlides/notesSlide7.xml><?xml version="1.0" encoding="utf-8"?>
+<p:notes xmlns:a="http://schemas.openxmlformats.org/drawingml/2006/main" xmlns:r="http://schemas.openxmlformats.org/officeDocument/2006/relationships" xmlns:p="http://schemas.openxmlformats.org/presentationml/2006/main">
+  <p:cSld>
+    <p:spTree>
+      <p:nvGrpSpPr>
+        <p:cNvPr id="1" name=""/>
+        <p:cNvGrpSpPr/>
+        <p:nvPr/>
+      </p:nvGrpSpPr>
+      <p:grpSpPr>
+        <a:xfrm>
+          <a:off x="0" y="0"/>
+          <a:ext cx="0" cy="0"/>
+          <a:chOff x="0" y="0"/>
+          <a:chExt cx="0" cy="0"/>
+        </a:xfrm>
+      </p:grpSpPr>
+      <p:sp>
+        <p:nvSpPr>
+          <p:cNvPr id="2" name="Slide Image Placeholder 1"/>
+          <p:cNvSpPr>
+            <a:spLocks noGrp="1" noRot="1" noChangeAspect="1"/>
+          </p:cNvSpPr>
+          <p:nvPr>
+            <p:ph type="sldImg"/>
+          </p:nvPr>
+        </p:nvSpPr>
+        <p:spPr/>
+      </p:sp>
+      <p:sp>
+        <p:nvSpPr>
+          <p:cNvPr id="3" name="Notes Placeholder 2"/>
+          <p:cNvSpPr>
+            <a:spLocks noGrp="1"/>
+          </p:cNvSpPr>
+          <p:nvPr>
+            <p:ph type="body" idx="1"/>
+          </p:nvPr>
+        </p:nvSpPr>
+        <p:spPr/>
+        <p:txBody>
+          <a:bodyPr/>
+          <a:lstStyle/>
+          <a:p>
+            <a:endParaRPr lang="en-US"/>
+          </a:p>
+        </p:txBody>
+      </p:sp>
+      <p:sp>
+        <p:nvSpPr>
+          <p:cNvPr id="4" name="Slide Number Placeholder 3"/>
+          <p:cNvSpPr>
+            <a:spLocks noGrp="1"/>
+          </p:cNvSpPr>
+          <p:nvPr>
+            <p:ph type="sldNum" sz="quarter" idx="5"/>
+          </p:nvPr>
+        </p:nvSpPr>
+        <p:spPr/>
+        <p:txBody>
+          <a:bodyPr/>
+          <a:lstStyle/>
+          <a:p>
+            <a:fld id="{28D5023D-FE11-054C-B5E3-AB75B1BC450A}" type="slidenum">
+              <a:rPr lang="en-US" smtClean="0"/>
+              <a:t>7</a:t>
+            </a:fld>
+            <a:endParaRPr lang="en-US"/>
+          </a:p>
+        </p:txBody>
+      </p:sp>
+    </p:spTree>
+    <p:extLst>
+      <p:ext uri="{BB962C8B-B14F-4D97-AF65-F5344CB8AC3E}">
+        <p14:creationId xmlns:p14="http://schemas.microsoft.com/office/powerpoint/2010/main" val="2134981072"/>
+      </p:ext>
+    </p:extLst>
+  </p:cSld>
+  <p:clrMapOvr>
+    <a:masterClrMapping/>
+  </p:clrMapOvr>
+</p:notes>
+</file>
+
+<file path=ppt/notesSlides/notesSlide8.xml><?xml version="1.0" encoding="utf-8"?>
+<p:notes xmlns:a="http://schemas.openxmlformats.org/drawingml/2006/main" xmlns:r="http://schemas.openxmlformats.org/officeDocument/2006/relationships" xmlns:p="http://schemas.openxmlformats.org/presentationml/2006/main">
+  <p:cSld>
+    <p:spTree>
+      <p:nvGrpSpPr>
+        <p:cNvPr id="1" name=""/>
+        <p:cNvGrpSpPr/>
+        <p:nvPr/>
+      </p:nvGrpSpPr>
+      <p:grpSpPr>
+        <a:xfrm>
+          <a:off x="0" y="0"/>
+          <a:ext cx="0" cy="0"/>
+          <a:chOff x="0" y="0"/>
+          <a:chExt cx="0" cy="0"/>
+        </a:xfrm>
+      </p:grpSpPr>
+      <p:sp>
+        <p:nvSpPr>
+          <p:cNvPr id="2" name="Slide Image Placeholder 1"/>
+          <p:cNvSpPr>
+            <a:spLocks noGrp="1" noRot="1" noChangeAspect="1"/>
+          </p:cNvSpPr>
+          <p:nvPr>
+            <p:ph type="sldImg"/>
+          </p:nvPr>
+        </p:nvSpPr>
+        <p:spPr/>
+      </p:sp>
+      <p:sp>
+        <p:nvSpPr>
+          <p:cNvPr id="3" name="Notes Placeholder 2"/>
+          <p:cNvSpPr>
+            <a:spLocks noGrp="1"/>
+          </p:cNvSpPr>
+          <p:nvPr>
+            <p:ph type="body" idx="1"/>
+          </p:nvPr>
+        </p:nvSpPr>
+        <p:spPr/>
+        <p:txBody>
+          <a:bodyPr/>
+          <a:lstStyle/>
+          <a:p>
+            <a:endParaRPr lang="en-US"/>
+          </a:p>
+        </p:txBody>
+      </p:sp>
+      <p:sp>
+        <p:nvSpPr>
+          <p:cNvPr id="4" name="Slide Number Placeholder 3"/>
+          <p:cNvSpPr>
+            <a:spLocks noGrp="1"/>
+          </p:cNvSpPr>
+          <p:nvPr>
+            <p:ph type="sldNum" sz="quarter" idx="5"/>
+          </p:nvPr>
+        </p:nvSpPr>
+        <p:spPr/>
+        <p:txBody>
+          <a:bodyPr/>
+          <a:lstStyle/>
+          <a:p>
+            <a:fld id="{28D5023D-FE11-054C-B5E3-AB75B1BC450A}" type="slidenum">
+              <a:rPr lang="en-US" smtClean="0"/>
+              <a:t>8</a:t>
+            </a:fld>
+            <a:endParaRPr lang="en-US"/>
+          </a:p>
+        </p:txBody>
+      </p:sp>
+    </p:spTree>
+    <p:extLst>
+      <p:ext uri="{BB962C8B-B14F-4D97-AF65-F5344CB8AC3E}">
+        <p14:creationId xmlns:p14="http://schemas.microsoft.com/office/powerpoint/2010/main" val="4188974544"/>
+      </p:ext>
+    </p:extLst>
+  </p:cSld>
+  <p:clrMapOvr>
+    <a:masterClrMapping/>
+  </p:clrMapOvr>
+</p:notes>
+</file>
+
+<file path=ppt/notesSlides/notesSlide9.xml><?xml version="1.0" encoding="utf-8"?>
+<p:notes xmlns:a="http://schemas.openxmlformats.org/drawingml/2006/main" xmlns:r="http://schemas.openxmlformats.org/officeDocument/2006/relationships" xmlns:p="http://schemas.openxmlformats.org/presentationml/2006/main">
+  <p:cSld>
+    <p:spTree>
+      <p:nvGrpSpPr>
+        <p:cNvPr id="1" name=""/>
+        <p:cNvGrpSpPr/>
+        <p:nvPr/>
+      </p:nvGrpSpPr>
+      <p:grpSpPr>
+        <a:xfrm>
+          <a:off x="0" y="0"/>
+          <a:ext cx="0" cy="0"/>
+          <a:chOff x="0" y="0"/>
+          <a:chExt cx="0" cy="0"/>
+        </a:xfrm>
+      </p:grpSpPr>
+      <p:sp>
+        <p:nvSpPr>
+          <p:cNvPr id="2" name="Slide Image Placeholder 1"/>
+          <p:cNvSpPr>
+            <a:spLocks noGrp="1" noRot="1" noChangeAspect="1"/>
+          </p:cNvSpPr>
+          <p:nvPr>
+            <p:ph type="sldImg"/>
+          </p:nvPr>
+        </p:nvSpPr>
+        <p:spPr/>
+      </p:sp>
+      <p:sp>
+        <p:nvSpPr>
+          <p:cNvPr id="3" name="Notes Placeholder 2"/>
+          <p:cNvSpPr>
+            <a:spLocks noGrp="1"/>
+          </p:cNvSpPr>
+          <p:nvPr>
+            <p:ph type="body" idx="1"/>
+          </p:nvPr>
+        </p:nvSpPr>
+        <p:spPr/>
+        <p:txBody>
+          <a:bodyPr/>
+          <a:lstStyle/>
+          <a:p>
+            <a:endParaRPr lang="en-US"/>
+          </a:p>
+        </p:txBody>
+      </p:sp>
+      <p:sp>
+        <p:nvSpPr>
+          <p:cNvPr id="4" name="Slide Number Placeholder 3"/>
+          <p:cNvSpPr>
+            <a:spLocks noGrp="1"/>
+          </p:cNvSpPr>
+          <p:nvPr>
+            <p:ph type="sldNum" sz="quarter" idx="5"/>
+          </p:nvPr>
+        </p:nvSpPr>
+        <p:spPr/>
+        <p:txBody>
+          <a:bodyPr/>
+          <a:lstStyle/>
+          <a:p>
+            <a:fld id="{28D5023D-FE11-054C-B5E3-AB75B1BC450A}" type="slidenum">
+              <a:rPr lang="en-US" smtClean="0"/>
+              <a:t>9</a:t>
+            </a:fld>
+            <a:endParaRPr lang="en-US"/>
+          </a:p>
+        </p:txBody>
+      </p:sp>
+    </p:spTree>
+    <p:extLst>
+      <p:ext uri="{BB962C8B-B14F-4D97-AF65-F5344CB8AC3E}">
+        <p14:creationId xmlns:p14="http://schemas.microsoft.com/office/powerpoint/2010/main" val="1340785543"/>
+      </p:ext>
+    </p:extLst>
+  </p:cSld>
+  <p:clrMapOvr>
+    <a:masterClrMapping/>
+  </p:clrMapOvr>
+</p:notes>
+</file>
+
 <file path=ppt/slideLayouts/slideLayout1.xml><?xml version="1.0" encoding="utf-8"?>
 <p:sldLayout xmlns:a="http://schemas.openxmlformats.org/drawingml/2006/main" xmlns:r="http://schemas.openxmlformats.org/officeDocument/2006/relationships" xmlns:p="http://schemas.openxmlformats.org/presentationml/2006/main" type="title" preserve="1">
   <p:cSld name="Title Slide">
@@ -322,7 +3614,7 @@
           <a:p>
             <a:fld id="{220BD450-5107-424A-9054-544A25915243}" type="datetimeFigureOut">
               <a:rPr lang="en-US" smtClean="0"/>
-              <a:t>3/30/26</a:t>
+              <a:t>3/31/26</a:t>
             </a:fld>
             <a:endParaRPr lang="en-US"/>
           </a:p>
@@ -520,7 +3812,7 @@
           <a:p>
             <a:fld id="{220BD450-5107-424A-9054-544A25915243}" type="datetimeFigureOut">
               <a:rPr lang="en-US" smtClean="0"/>
-              <a:t>3/30/26</a:t>
+              <a:t>3/31/26</a:t>
             </a:fld>
             <a:endParaRPr lang="en-US"/>
           </a:p>
@@ -728,7 +4020,7 @@
           <a:p>
             <a:fld id="{220BD450-5107-424A-9054-544A25915243}" type="datetimeFigureOut">
               <a:rPr lang="en-US" smtClean="0"/>
-              <a:t>3/30/26</a:t>
+              <a:t>3/31/26</a:t>
             </a:fld>
             <a:endParaRPr lang="en-US"/>
           </a:p>
@@ -926,7 +4218,7 @@
           <a:p>
             <a:fld id="{220BD450-5107-424A-9054-544A25915243}" type="datetimeFigureOut">
               <a:rPr lang="en-US" smtClean="0"/>
-              <a:t>3/30/26</a:t>
+              <a:t>3/31/26</a:t>
             </a:fld>
             <a:endParaRPr lang="en-US"/>
           </a:p>
@@ -1201,7 +4493,7 @@
           <a:p>
             <a:fld id="{220BD450-5107-424A-9054-544A25915243}" type="datetimeFigureOut">
               <a:rPr lang="en-US" smtClean="0"/>
-              <a:t>3/30/26</a:t>
+              <a:t>3/31/26</a:t>
             </a:fld>
             <a:endParaRPr lang="en-US"/>
           </a:p>
@@ -1466,7 +4758,7 @@
           <a:p>
             <a:fld id="{220BD450-5107-424A-9054-544A25915243}" type="datetimeFigureOut">
               <a:rPr lang="en-US" smtClean="0"/>
-              <a:t>3/30/26</a:t>
+              <a:t>3/31/26</a:t>
             </a:fld>
             <a:endParaRPr lang="en-US"/>
           </a:p>
@@ -1878,7 +5170,7 @@
           <a:p>
             <a:fld id="{220BD450-5107-424A-9054-544A25915243}" type="datetimeFigureOut">
               <a:rPr lang="en-US" smtClean="0"/>
-              <a:t>3/30/26</a:t>
+              <a:t>3/31/26</a:t>
             </a:fld>
             <a:endParaRPr lang="en-US"/>
           </a:p>
@@ -2019,7 +5311,7 @@
           <a:p>
             <a:fld id="{220BD450-5107-424A-9054-544A25915243}" type="datetimeFigureOut">
               <a:rPr lang="en-US" smtClean="0"/>
-              <a:t>3/30/26</a:t>
+              <a:t>3/31/26</a:t>
             </a:fld>
             <a:endParaRPr lang="en-US"/>
           </a:p>
@@ -2132,7 +5424,7 @@
           <a:p>
             <a:fld id="{220BD450-5107-424A-9054-544A25915243}" type="datetimeFigureOut">
               <a:rPr lang="en-US" smtClean="0"/>
-              <a:t>3/30/26</a:t>
+              <a:t>3/31/26</a:t>
             </a:fld>
             <a:endParaRPr lang="en-US"/>
           </a:p>
@@ -2443,7 +5735,7 @@
           <a:p>
             <a:fld id="{220BD450-5107-424A-9054-544A25915243}" type="datetimeFigureOut">
               <a:rPr lang="en-US" smtClean="0"/>
-              <a:t>3/30/26</a:t>
+              <a:t>3/31/26</a:t>
             </a:fld>
             <a:endParaRPr lang="en-US"/>
           </a:p>
@@ -2731,7 +6023,7 @@
           <a:p>
             <a:fld id="{220BD450-5107-424A-9054-544A25915243}" type="datetimeFigureOut">
               <a:rPr lang="en-US" smtClean="0"/>
-              <a:t>3/30/26</a:t>
+              <a:t>3/31/26</a:t>
             </a:fld>
             <a:endParaRPr lang="en-US"/>
           </a:p>
@@ -2972,7 +6264,7 @@
           <a:p>
             <a:fld id="{220BD450-5107-424A-9054-544A25915243}" type="datetimeFigureOut">
               <a:rPr lang="en-US" smtClean="0"/>
-              <a:t>3/30/26</a:t>
+              <a:t>3/31/26</a:t>
             </a:fld>
             <a:endParaRPr lang="en-US"/>
           </a:p>
@@ -3853,7 +7145,7 @@
           <p:nvPr/>
         </p:nvPicPr>
         <p:blipFill>
-          <a:blip r:embed="rId2"/>
+          <a:blip r:embed="rId3"/>
           <a:stretch>
             <a:fillRect/>
           </a:stretch>
@@ -4369,7 +7661,7 @@
           <p:nvPr/>
         </p:nvPicPr>
         <p:blipFill>
-          <a:blip r:embed="rId2"/>
+          <a:blip r:embed="rId3"/>
           <a:stretch>
             <a:fillRect/>
           </a:stretch>
@@ -4815,7 +8107,7 @@
           <p:nvPr/>
         </p:nvPicPr>
         <p:blipFill>
-          <a:blip r:embed="rId2"/>
+          <a:blip r:embed="rId3"/>
           <a:stretch>
             <a:fillRect/>
           </a:stretch>
@@ -5319,7 +8611,7 @@
           <p:nvPr/>
         </p:nvPicPr>
         <p:blipFill>
-          <a:blip r:embed="rId2"/>
+          <a:blip r:embed="rId3"/>
           <a:stretch>
             <a:fillRect/>
           </a:stretch>
@@ -5835,7 +9127,7 @@
           <p:nvPr/>
         </p:nvPicPr>
         <p:blipFill>
-          <a:blip r:embed="rId2"/>
+          <a:blip r:embed="rId3"/>
           <a:stretch>
             <a:fillRect/>
           </a:stretch>
@@ -6351,7 +9643,7 @@
           <p:nvPr/>
         </p:nvPicPr>
         <p:blipFill>
-          <a:blip r:embed="rId2"/>
+          <a:blip r:embed="rId3"/>
           <a:stretch>
             <a:fillRect/>
           </a:stretch>
@@ -6867,7 +10159,7 @@
           <p:nvPr/>
         </p:nvPicPr>
         <p:blipFill>
-          <a:blip r:embed="rId2"/>
+          <a:blip r:embed="rId3"/>
           <a:stretch>
             <a:fillRect/>
           </a:stretch>
@@ -7383,7 +10675,7 @@
           <p:nvPr/>
         </p:nvPicPr>
         <p:blipFill>
-          <a:blip r:embed="rId2"/>
+          <a:blip r:embed="rId3"/>
           <a:stretch>
             <a:fillRect/>
           </a:stretch>
@@ -7899,7 +11191,7 @@
           <p:nvPr/>
         </p:nvPicPr>
         <p:blipFill>
-          <a:blip r:embed="rId2"/>
+          <a:blip r:embed="rId3"/>
           <a:stretch>
             <a:fillRect/>
           </a:stretch>
@@ -8403,7 +11695,7 @@
           <p:nvPr/>
         </p:nvPicPr>
         <p:blipFill>
-          <a:blip r:embed="rId2"/>
+          <a:blip r:embed="rId3"/>
           <a:stretch>
             <a:fillRect/>
           </a:stretch>
@@ -8919,7 +12211,7 @@
           <p:nvPr/>
         </p:nvPicPr>
         <p:blipFill>
-          <a:blip r:embed="rId2"/>
+          <a:blip r:embed="rId3"/>
           <a:stretch>
             <a:fillRect/>
           </a:stretch>
@@ -9643,7 +12935,7 @@
           <p:nvPr/>
         </p:nvPicPr>
         <p:blipFill>
-          <a:blip r:embed="rId2"/>
+          <a:blip r:embed="rId3"/>
           <a:stretch>
             <a:fillRect/>
           </a:stretch>
@@ -10147,7 +13439,7 @@
           <p:nvPr/>
         </p:nvPicPr>
         <p:blipFill>
-          <a:blip r:embed="rId2"/>
+          <a:blip r:embed="rId3"/>
           <a:stretch>
             <a:fillRect/>
           </a:stretch>
@@ -10593,7 +13885,7 @@
           <p:nvPr/>
         </p:nvPicPr>
         <p:blipFill>
-          <a:blip r:embed="rId2"/>
+          <a:blip r:embed="rId3"/>
           <a:stretch>
             <a:fillRect/>
           </a:stretch>
@@ -11097,7 +14389,7 @@
           <p:nvPr/>
         </p:nvPicPr>
         <p:blipFill>
-          <a:blip r:embed="rId2"/>
+          <a:blip r:embed="rId3"/>
           <a:stretch>
             <a:fillRect/>
           </a:stretch>
@@ -11601,7 +14893,7 @@
           <p:nvPr/>
         </p:nvPicPr>
         <p:blipFill>
-          <a:blip r:embed="rId2"/>
+          <a:blip r:embed="rId3"/>
           <a:stretch>
             <a:fillRect/>
           </a:stretch>
@@ -12105,7 +15397,7 @@
           <p:nvPr/>
         </p:nvPicPr>
         <p:blipFill>
-          <a:blip r:embed="rId2"/>
+          <a:blip r:embed="rId3"/>
           <a:stretch>
             <a:fillRect/>
           </a:stretch>
@@ -12609,7 +15901,7 @@
           <p:nvPr/>
         </p:nvPicPr>
         <p:blipFill>
-          <a:blip r:embed="rId2"/>
+          <a:blip r:embed="rId3"/>
           <a:stretch>
             <a:fillRect/>
           </a:stretch>
@@ -13125,7 +16417,7 @@
           <p:nvPr/>
         </p:nvPicPr>
         <p:blipFill>
-          <a:blip r:embed="rId2"/>
+          <a:blip r:embed="rId3"/>
           <a:stretch>
             <a:fillRect/>
           </a:stretch>
@@ -13641,7 +16933,7 @@
           <p:nvPr/>
         </p:nvPicPr>
         <p:blipFill>
-          <a:blip r:embed="rId2"/>
+          <a:blip r:embed="rId3"/>
           <a:stretch>
             <a:fillRect/>
           </a:stretch>
@@ -14145,7 +17437,7 @@
           <p:nvPr/>
         </p:nvPicPr>
         <p:blipFill>
-          <a:blip r:embed="rId2"/>
+          <a:blip r:embed="rId3"/>
           <a:stretch>
             <a:fillRect/>
           </a:stretch>
@@ -14661,7 +17953,7 @@
           <p:nvPr/>
         </p:nvPicPr>
         <p:blipFill>
-          <a:blip r:embed="rId2"/>
+          <a:blip r:embed="rId3"/>
           <a:stretch>
             <a:fillRect/>
           </a:stretch>
@@ -15165,7 +18457,7 @@
           <p:nvPr/>
         </p:nvPicPr>
         <p:blipFill>
-          <a:blip r:embed="rId2"/>
+          <a:blip r:embed="rId3"/>
           <a:stretch>
             <a:fillRect/>
           </a:stretch>
@@ -15669,7 +18961,7 @@
           <p:nvPr/>
         </p:nvPicPr>
         <p:blipFill>
-          <a:blip r:embed="rId2"/>
+          <a:blip r:embed="rId3"/>
           <a:stretch>
             <a:fillRect/>
           </a:stretch>
@@ -16173,7 +19465,7 @@
           <p:nvPr/>
         </p:nvPicPr>
         <p:blipFill>
-          <a:blip r:embed="rId2"/>
+          <a:blip r:embed="rId3"/>
           <a:stretch>
             <a:fillRect/>
           </a:stretch>
@@ -16607,7 +19899,7 @@
           <p:nvPr/>
         </p:nvPicPr>
         <p:blipFill>
-          <a:blip r:embed="rId2"/>
+          <a:blip r:embed="rId3"/>
           <a:stretch>
             <a:fillRect/>
           </a:stretch>
@@ -17111,7 +20403,7 @@
           <p:nvPr/>
         </p:nvPicPr>
         <p:blipFill>
-          <a:blip r:embed="rId2"/>
+          <a:blip r:embed="rId3"/>
           <a:stretch>
             <a:fillRect/>
           </a:stretch>
@@ -17615,7 +20907,7 @@
           <p:nvPr/>
         </p:nvPicPr>
         <p:blipFill>
-          <a:blip r:embed="rId2"/>
+          <a:blip r:embed="rId3"/>
           <a:stretch>
             <a:fillRect/>
           </a:stretch>
@@ -20165,7 +23457,7 @@
           <p:nvPr/>
         </p:nvPicPr>
         <p:blipFill>
-          <a:blip r:embed="rId2"/>
+          <a:blip r:embed="rId3"/>
           <a:stretch>
             <a:fillRect/>
           </a:stretch>
@@ -25768,7 +29060,7 @@
           <p:nvPr/>
         </p:nvPicPr>
         <p:blipFill>
-          <a:blip r:embed="rId2"/>
+          <a:blip r:embed="rId3"/>
           <a:stretch>
             <a:fillRect/>
           </a:stretch>
@@ -31206,7 +34498,7 @@
           <p:nvPr/>
         </p:nvPicPr>
         <p:blipFill>
-          <a:blip r:embed="rId2"/>
+          <a:blip r:embed="rId3"/>
           <a:stretch>
             <a:fillRect/>
           </a:stretch>
@@ -34266,7 +37558,7 @@
           <p:nvPr/>
         </p:nvPicPr>
         <p:blipFill>
-          <a:blip r:embed="rId2"/>
+          <a:blip r:embed="rId3"/>
           <a:stretch>
             <a:fillRect/>
           </a:stretch>
@@ -34782,7 +38074,7 @@
           <p:nvPr/>
         </p:nvPicPr>
         <p:blipFill>
-          <a:blip r:embed="rId2"/>
+          <a:blip r:embed="rId3"/>
           <a:stretch>
             <a:fillRect/>
           </a:stretch>
@@ -35286,7 +38578,7 @@
           <p:nvPr/>
         </p:nvPicPr>
         <p:blipFill>
-          <a:blip r:embed="rId2"/>
+          <a:blip r:embed="rId3"/>
           <a:stretch>
             <a:fillRect/>
           </a:stretch>
@@ -35622,4 +38914,319 @@
     </a:ext>
   </a:extLst>
 </a:theme>
+</file>
+
+<file path=ppt/theme/theme2.xml><?xml version="1.0" encoding="utf-8"?>
+<a:theme xmlns:a="http://schemas.openxmlformats.org/drawingml/2006/main" name="Office Theme">
+  <a:themeElements>
+    <a:clrScheme name="Office">
+      <a:dk1>
+        <a:sysClr val="windowText" lastClr="000000"/>
+      </a:dk1>
+      <a:lt1>
+        <a:sysClr val="window" lastClr="FFFFFF"/>
+      </a:lt1>
+      <a:dk2>
+        <a:srgbClr val="0E2841"/>
+      </a:dk2>
+      <a:lt2>
+        <a:srgbClr val="E8E8E8"/>
+      </a:lt2>
+      <a:accent1>
+        <a:srgbClr val="156082"/>
+      </a:accent1>
+      <a:accent2>
+        <a:srgbClr val="E97132"/>
+      </a:accent2>
+      <a:accent3>
+        <a:srgbClr val="196B24"/>
+      </a:accent3>
+      <a:accent4>
+        <a:srgbClr val="0F9ED5"/>
+      </a:accent4>
+      <a:accent5>
+        <a:srgbClr val="A02B93"/>
+      </a:accent5>
+      <a:accent6>
+        <a:srgbClr val="4EA72E"/>
+      </a:accent6>
+      <a:hlink>
+        <a:srgbClr val="467886"/>
+      </a:hlink>
+      <a:folHlink>
+        <a:srgbClr val="96607D"/>
+      </a:folHlink>
+    </a:clrScheme>
+    <a:fontScheme name="Office">
+      <a:majorFont>
+        <a:latin typeface="Aptos Display" panose="02110004020202020204"/>
+        <a:ea typeface=""/>
+        <a:cs typeface=""/>
+        <a:font script="Jpan" typeface="游ゴシック Light"/>
+        <a:font script="Hang" typeface="맑은 고딕"/>
+        <a:font script="Hans" typeface="等线 Light"/>
+        <a:font script="Hant" typeface="新細明體"/>
+        <a:font script="Arab" typeface="Times New Roman"/>
+        <a:font script="Hebr" typeface="Times New Roman"/>
+        <a:font script="Thai" typeface="Angsana New"/>
+        <a:font script="Ethi" typeface="Nyala"/>
+        <a:font script="Beng" typeface="Vrinda"/>
+        <a:font script="Gujr" typeface="Shruti"/>
+        <a:font script="Khmr" typeface="MoolBoran"/>
+        <a:font script="Knda" typeface="Tunga"/>
+        <a:font script="Guru" typeface="Raavi"/>
+        <a:font script="Cans" typeface="Euphemia"/>
+        <a:font script="Cher" typeface="Plantagenet Cherokee"/>
+        <a:font script="Yiii" typeface="Microsoft Yi Baiti"/>
+        <a:font script="Tibt" typeface="Microsoft Himalaya"/>
+        <a:font script="Thaa" typeface="MV Boli"/>
+        <a:font script="Deva" typeface="Mangal"/>
+        <a:font script="Telu" typeface="Gautami"/>
+        <a:font script="Taml" typeface="Latha"/>
+        <a:font script="Syrc" typeface="Estrangelo Edessa"/>
+        <a:font script="Orya" typeface="Kalinga"/>
+        <a:font script="Mlym" typeface="Kartika"/>
+        <a:font script="Laoo" typeface="DokChampa"/>
+        <a:font script="Sinh" typeface="Iskoola Pota"/>
+        <a:font script="Mong" typeface="Mongolian Baiti"/>
+        <a:font script="Viet" typeface="Times New Roman"/>
+        <a:font script="Uigh" typeface="Microsoft Uighur"/>
+        <a:font script="Geor" typeface="Sylfaen"/>
+        <a:font script="Armn" typeface="Arial"/>
+        <a:font script="Bugi" typeface="Leelawadee UI"/>
+        <a:font script="Bopo" typeface="Microsoft JhengHei"/>
+        <a:font script="Java" typeface="Javanese Text"/>
+        <a:font script="Lisu" typeface="Segoe UI"/>
+        <a:font script="Mymr" typeface="Myanmar Text"/>
+        <a:font script="Nkoo" typeface="Ebrima"/>
+        <a:font script="Olck" typeface="Nirmala UI"/>
+        <a:font script="Osma" typeface="Ebrima"/>
+        <a:font script="Phag" typeface="Phagspa"/>
+        <a:font script="Syrn" typeface="Estrangelo Edessa"/>
+        <a:font script="Syrj" typeface="Estrangelo Edessa"/>
+        <a:font script="Syre" typeface="Estrangelo Edessa"/>
+        <a:font script="Sora" typeface="Nirmala UI"/>
+        <a:font script="Tale" typeface="Microsoft Tai Le"/>
+        <a:font script="Talu" typeface="Microsoft New Tai Lue"/>
+        <a:font script="Tfng" typeface="Ebrima"/>
+      </a:majorFont>
+      <a:minorFont>
+        <a:latin typeface="Aptos" panose="02110004020202020204"/>
+        <a:ea typeface=""/>
+        <a:cs typeface=""/>
+        <a:font script="Jpan" typeface="游ゴシック"/>
+        <a:font script="Hang" typeface="맑은 고딕"/>
+        <a:font script="Hans" typeface="等线"/>
+        <a:font script="Hant" typeface="新細明體"/>
+        <a:font script="Arab" typeface="Arial"/>
+        <a:font script="Hebr" typeface="Arial"/>
+        <a:font script="Thai" typeface="Cordia New"/>
+        <a:font script="Ethi" typeface="Nyala"/>
+        <a:font script="Beng" typeface="Vrinda"/>
+        <a:font script="Gujr" typeface="Shruti"/>
+        <a:font script="Khmr" typeface="DaunPenh"/>
+        <a:font script="Knda" typeface="Tunga"/>
+        <a:font script="Guru" typeface="Raavi"/>
+        <a:font script="Cans" typeface="Euphemia"/>
+        <a:font script="Cher" typeface="Plantagenet Cherokee"/>
+        <a:font script="Yiii" typeface="Microsoft Yi Baiti"/>
+        <a:font script="Tibt" typeface="Microsoft Himalaya"/>
+        <a:font script="Thaa" typeface="MV Boli"/>
+        <a:font script="Deva" typeface="Mangal"/>
+        <a:font script="Telu" typeface="Gautami"/>
+        <a:font script="Taml" typeface="Latha"/>
+        <a:font script="Syrc" typeface="Estrangelo Edessa"/>
+        <a:font script="Orya" typeface="Kalinga"/>
+        <a:font script="Mlym" typeface="Kartika"/>
+        <a:font script="Laoo" typeface="DokChampa"/>
+        <a:font script="Sinh" typeface="Iskoola Pota"/>
+        <a:font script="Mong" typeface="Mongolian Baiti"/>
+        <a:font script="Viet" typeface="Arial"/>
+        <a:font script="Uigh" typeface="Microsoft Uighur"/>
+        <a:font script="Geor" typeface="Sylfaen"/>
+        <a:font script="Armn" typeface="Arial"/>
+        <a:font script="Bugi" typeface="Leelawadee UI"/>
+        <a:font script="Bopo" typeface="Microsoft JhengHei"/>
+        <a:font script="Java" typeface="Javanese Text"/>
+        <a:font script="Lisu" typeface="Segoe UI"/>
+        <a:font script="Mymr" typeface="Myanmar Text"/>
+        <a:font script="Nkoo" typeface="Ebrima"/>
+        <a:font script="Olck" typeface="Nirmala UI"/>
+        <a:font script="Osma" typeface="Ebrima"/>
+        <a:font script="Phag" typeface="Phagspa"/>
+        <a:font script="Syrn" typeface="Estrangelo Edessa"/>
+        <a:font script="Syrj" typeface="Estrangelo Edessa"/>
+        <a:font script="Syre" typeface="Estrangelo Edessa"/>
+        <a:font script="Sora" typeface="Nirmala UI"/>
+        <a:font script="Tale" typeface="Microsoft Tai Le"/>
+        <a:font script="Talu" typeface="Microsoft New Tai Lue"/>
+        <a:font script="Tfng" typeface="Ebrima"/>
+      </a:minorFont>
+    </a:fontScheme>
+    <a:fmtScheme name="Office">
+      <a:fillStyleLst>
+        <a:solidFill>
+          <a:schemeClr val="phClr"/>
+        </a:solidFill>
+        <a:gradFill rotWithShape="1">
+          <a:gsLst>
+            <a:gs pos="0">
+              <a:schemeClr val="phClr">
+                <a:lumMod val="110000"/>
+                <a:satMod val="105000"/>
+                <a:tint val="67000"/>
+              </a:schemeClr>
+            </a:gs>
+            <a:gs pos="50000">
+              <a:schemeClr val="phClr">
+                <a:lumMod val="105000"/>
+                <a:satMod val="103000"/>
+                <a:tint val="73000"/>
+              </a:schemeClr>
+            </a:gs>
+            <a:gs pos="100000">
+              <a:schemeClr val="phClr">
+                <a:lumMod val="105000"/>
+                <a:satMod val="109000"/>
+                <a:tint val="81000"/>
+              </a:schemeClr>
+            </a:gs>
+          </a:gsLst>
+          <a:lin ang="5400000" scaled="0"/>
+        </a:gradFill>
+        <a:gradFill rotWithShape="1">
+          <a:gsLst>
+            <a:gs pos="0">
+              <a:schemeClr val="phClr">
+                <a:satMod val="103000"/>
+                <a:lumMod val="102000"/>
+                <a:tint val="94000"/>
+              </a:schemeClr>
+            </a:gs>
+            <a:gs pos="50000">
+              <a:schemeClr val="phClr">
+                <a:satMod val="110000"/>
+                <a:lumMod val="100000"/>
+                <a:shade val="100000"/>
+              </a:schemeClr>
+            </a:gs>
+            <a:gs pos="100000">
+              <a:schemeClr val="phClr">
+                <a:lumMod val="99000"/>
+                <a:satMod val="120000"/>
+                <a:shade val="78000"/>
+              </a:schemeClr>
+            </a:gs>
+          </a:gsLst>
+          <a:lin ang="5400000" scaled="0"/>
+        </a:gradFill>
+      </a:fillStyleLst>
+      <a:lnStyleLst>
+        <a:ln w="12700" cap="flat" cmpd="sng" algn="ctr">
+          <a:solidFill>
+            <a:schemeClr val="phClr"/>
+          </a:solidFill>
+          <a:prstDash val="solid"/>
+          <a:miter lim="800000"/>
+        </a:ln>
+        <a:ln w="19050" cap="flat" cmpd="sng" algn="ctr">
+          <a:solidFill>
+            <a:schemeClr val="phClr"/>
+          </a:solidFill>
+          <a:prstDash val="solid"/>
+          <a:miter lim="800000"/>
+        </a:ln>
+        <a:ln w="25400" cap="flat" cmpd="sng" algn="ctr">
+          <a:solidFill>
+            <a:schemeClr val="phClr"/>
+          </a:solidFill>
+          <a:prstDash val="solid"/>
+          <a:miter lim="800000"/>
+        </a:ln>
+      </a:lnStyleLst>
+      <a:effectStyleLst>
+        <a:effectStyle>
+          <a:effectLst/>
+        </a:effectStyle>
+        <a:effectStyle>
+          <a:effectLst/>
+        </a:effectStyle>
+        <a:effectStyle>
+          <a:effectLst>
+            <a:outerShdw blurRad="57150" dist="19050" dir="5400000" algn="ctr" rotWithShape="0">
+              <a:srgbClr val="000000">
+                <a:alpha val="63000"/>
+              </a:srgbClr>
+            </a:outerShdw>
+          </a:effectLst>
+        </a:effectStyle>
+      </a:effectStyleLst>
+      <a:bgFillStyleLst>
+        <a:solidFill>
+          <a:schemeClr val="phClr"/>
+        </a:solidFill>
+        <a:solidFill>
+          <a:schemeClr val="phClr">
+            <a:tint val="95000"/>
+            <a:satMod val="170000"/>
+          </a:schemeClr>
+        </a:solidFill>
+        <a:gradFill rotWithShape="1">
+          <a:gsLst>
+            <a:gs pos="0">
+              <a:schemeClr val="phClr">
+                <a:tint val="93000"/>
+                <a:satMod val="150000"/>
+                <a:shade val="98000"/>
+                <a:lumMod val="102000"/>
+              </a:schemeClr>
+            </a:gs>
+            <a:gs pos="50000">
+              <a:schemeClr val="phClr">
+                <a:tint val="98000"/>
+                <a:satMod val="130000"/>
+                <a:shade val="90000"/>
+                <a:lumMod val="103000"/>
+              </a:schemeClr>
+            </a:gs>
+            <a:gs pos="100000">
+              <a:schemeClr val="phClr">
+                <a:shade val="63000"/>
+                <a:satMod val="120000"/>
+              </a:schemeClr>
+            </a:gs>
+          </a:gsLst>
+          <a:lin ang="5400000" scaled="0"/>
+        </a:gradFill>
+      </a:bgFillStyleLst>
+    </a:fmtScheme>
+  </a:themeElements>
+  <a:objectDefaults>
+    <a:lnDef>
+      <a:spPr/>
+      <a:bodyPr/>
+      <a:lstStyle/>
+      <a:style>
+        <a:lnRef idx="2">
+          <a:schemeClr val="accent1"/>
+        </a:lnRef>
+        <a:fillRef idx="0">
+          <a:schemeClr val="accent1"/>
+        </a:fillRef>
+        <a:effectRef idx="1">
+          <a:schemeClr val="accent1"/>
+        </a:effectRef>
+        <a:fontRef idx="minor">
+          <a:schemeClr val="tx1"/>
+        </a:fontRef>
+      </a:style>
+    </a:lnDef>
+  </a:objectDefaults>
+  <a:extraClrSchemeLst/>
+  <a:extLst>
+    <a:ext uri="{05A4C25C-085E-4340-85A3-A5531E510DB2}">
+      <thm15:themeFamily xmlns:thm15="http://schemas.microsoft.com/office/thememl/2012/main" name="Office Theme" id="{2E142A2C-CD16-42D6-873A-C26D2A0506FA}" vid="{1BDDFF52-6CD6-40A5-AB3C-68EB2F1E4D0A}"/>
+    </a:ext>
+  </a:extLst>
+</a:theme>
 </file>